--- a/RAC/08장/8장_ASM리밸런스와이중화.pptx
+++ b/RAC/08장/8장_ASM리밸런스와이중화.pptx
@@ -4,45 +4,48 @@
   <p:sldMasterIdLst>
     <p:sldMasterId id="2147483648" r:id="rId1"/>
   </p:sldMasterIdLst>
+  <p:notesMasterIdLst>
+    <p:notesMasterId r:id="rId38"/>
+  </p:notesMasterIdLst>
   <p:sldIdLst>
-    <p:sldId id="256" r:id="rId7"/>
-    <p:sldId id="257" r:id="rId8"/>
-    <p:sldId id="258" r:id="rId9"/>
-    <p:sldId id="259" r:id="rId10"/>
-    <p:sldId id="260" r:id="rId12"/>
-    <p:sldId id="261" r:id="rId13"/>
-    <p:sldId id="262" r:id="rId14"/>
-    <p:sldId id="263" r:id="rId15"/>
-    <p:sldId id="264" r:id="rId16"/>
-    <p:sldId id="265" r:id="rId17"/>
-    <p:sldId id="266" r:id="rId18"/>
-    <p:sldId id="267" r:id="rId19"/>
-    <p:sldId id="268" r:id="rId20"/>
-    <p:sldId id="269" r:id="rId21"/>
-    <p:sldId id="270" r:id="rId22"/>
-    <p:sldId id="271" r:id="rId23"/>
-    <p:sldId id="272" r:id="rId24"/>
-    <p:sldId id="273" r:id="rId25"/>
-    <p:sldId id="274" r:id="rId26"/>
-    <p:sldId id="275" r:id="rId27"/>
-    <p:sldId id="276" r:id="rId28"/>
-    <p:sldId id="277" r:id="rId29"/>
-    <p:sldId id="278" r:id="rId30"/>
-    <p:sldId id="279" r:id="rId31"/>
-    <p:sldId id="280" r:id="rId32"/>
-    <p:sldId id="281" r:id="rId33"/>
-    <p:sldId id="282" r:id="rId34"/>
-    <p:sldId id="283" r:id="rId35"/>
-    <p:sldId id="284" r:id="rId36"/>
-    <p:sldId id="285" r:id="rId37"/>
-    <p:sldId id="286" r:id="rId38"/>
-    <p:sldId id="287" r:id="rId39"/>
-    <p:sldId id="288" r:id="rId40"/>
-    <p:sldId id="289" r:id="rId41"/>
-    <p:sldId id="290" r:id="rId42"/>
-    <p:sldId id="291" r:id="rId43"/>
+    <p:sldId id="256" r:id="rId2"/>
+    <p:sldId id="257" r:id="rId3"/>
+    <p:sldId id="258" r:id="rId4"/>
+    <p:sldId id="259" r:id="rId5"/>
+    <p:sldId id="260" r:id="rId6"/>
+    <p:sldId id="261" r:id="rId7"/>
+    <p:sldId id="262" r:id="rId8"/>
+    <p:sldId id="263" r:id="rId9"/>
+    <p:sldId id="264" r:id="rId10"/>
+    <p:sldId id="265" r:id="rId11"/>
+    <p:sldId id="266" r:id="rId12"/>
+    <p:sldId id="267" r:id="rId13"/>
+    <p:sldId id="268" r:id="rId14"/>
+    <p:sldId id="269" r:id="rId15"/>
+    <p:sldId id="270" r:id="rId16"/>
+    <p:sldId id="271" r:id="rId17"/>
+    <p:sldId id="272" r:id="rId18"/>
+    <p:sldId id="273" r:id="rId19"/>
+    <p:sldId id="274" r:id="rId20"/>
+    <p:sldId id="275" r:id="rId21"/>
+    <p:sldId id="276" r:id="rId22"/>
+    <p:sldId id="277" r:id="rId23"/>
+    <p:sldId id="278" r:id="rId24"/>
+    <p:sldId id="279" r:id="rId25"/>
+    <p:sldId id="280" r:id="rId26"/>
+    <p:sldId id="281" r:id="rId27"/>
+    <p:sldId id="282" r:id="rId28"/>
+    <p:sldId id="283" r:id="rId29"/>
+    <p:sldId id="284" r:id="rId30"/>
+    <p:sldId id="285" r:id="rId31"/>
+    <p:sldId id="286" r:id="rId32"/>
+    <p:sldId id="287" r:id="rId33"/>
+    <p:sldId id="288" r:id="rId34"/>
+    <p:sldId id="289" r:id="rId35"/>
+    <p:sldId id="290" r:id="rId36"/>
+    <p:sldId id="291" r:id="rId37"/>
   </p:sldIdLst>
-  <p:sldSz cx="12191695" cy="6858000" type="screen4x3"/>
+  <p:sldSz cx="12192000" cy="6858000"/>
   <p:notesSz cx="6858000" cy="9144000"/>
   <p:defaultTextStyle>
     <a:defPPr>
@@ -139,11 +142,27 @@
       </a:defRPr>
     </a:lvl9pPr>
   </p:defaultTextStyle>
+  <p:extLst>
+    <p:ext uri="{EFAFB233-063F-42B5-8137-9DF3F51BA10A}">
+      <p15:sldGuideLst xmlns:p15="http://schemas.microsoft.com/office/powerpoint/2012/main">
+        <p15:guide id="1" orient="horz" pos="2160">
+          <p15:clr>
+            <a:srgbClr val="A4A3A4"/>
+          </p15:clr>
+        </p15:guide>
+        <p15:guide id="2" pos="2880">
+          <p15:clr>
+            <a:srgbClr val="A4A3A4"/>
+          </p15:clr>
+        </p15:guide>
+      </p15:sldGuideLst>
+    </p:ext>
+  </p:extLst>
 </p:presentation>
 </file>
 
 <file path=ppt/notesMasters/notesMaster1.xml><?xml version="1.0" encoding="utf-8"?>
-<p:notesMaster xmlns:a="http://schemas.openxmlformats.org/drawingml/2006/main" xmlns:p="http://schemas.openxmlformats.org/presentationml/2006/main" xmlns:r="http://schemas.openxmlformats.org/officeDocument/2006/relationships">
+<p:notesMaster xmlns:a="http://schemas.openxmlformats.org/drawingml/2006/main" xmlns:r="http://schemas.openxmlformats.org/officeDocument/2006/relationships" xmlns:p="http://schemas.openxmlformats.org/presentationml/2006/main">
   <p:cSld>
     <p:bg>
       <p:bgRef idx="1001">
@@ -166,7 +185,7 @@
       </p:grpSpPr>
       <p:sp>
         <p:nvSpPr>
-          <p:cNvPr id="2" name="Header Placeholder 1"/>
+          <p:cNvPr id="2" name="머리글 개체 틀 1"/>
           <p:cNvSpPr>
             <a:spLocks noGrp="1"/>
           </p:cNvSpPr>
@@ -177,7 +196,7 @@
         <p:spPr>
           <a:xfrm>
             <a:off x="0" y="0"/>
-            <a:ext cx="2971800" cy="457200"/>
+            <a:ext cx="2971800" cy="458788"/>
           </a:xfrm>
           <a:prstGeom prst="rect">
             <a:avLst/>
@@ -191,13 +210,13 @@
             </a:lvl1pPr>
           </a:lstStyle>
           <a:p>
-            <a:endParaRPr lang="en-US"/>
-          </a:p>
-        </p:txBody>
-      </p:sp>
-      <p:sp>
-        <p:nvSpPr>
-          <p:cNvPr id="3" name="Date Placeholder 2"/>
+            <a:endParaRPr lang="ko-KR" altLang="en-US"/>
+          </a:p>
+        </p:txBody>
+      </p:sp>
+      <p:sp>
+        <p:nvSpPr>
+          <p:cNvPr id="3" name="날짜 개체 틀 2"/>
           <p:cNvSpPr>
             <a:spLocks noGrp="1"/>
           </p:cNvSpPr>
@@ -208,7 +227,7 @@
         <p:spPr>
           <a:xfrm>
             <a:off x="3884613" y="0"/>
-            <a:ext cx="2971800" cy="457200"/>
+            <a:ext cx="2971800" cy="458788"/>
           </a:xfrm>
           <a:prstGeom prst="rect">
             <a:avLst/>
@@ -222,17 +241,17 @@
             </a:lvl1pPr>
           </a:lstStyle>
           <a:p>
-            <a:fld id="{0F89C1C7-3DCD-1040-A9CF-14679D8B5DDD}" type="datetimeFigureOut">
-              <a:rPr lang="en-US" smtClean="0"/>
-              <a:t>10/17/16</a:t>
+            <a:fld id="{21429AB3-8DEE-4F58-A697-48990A75C6B9}" type="datetimeFigureOut">
+              <a:rPr lang="ko-KR" altLang="en-US" smtClean="0"/>
+              <a:t>2026-10-29</a:t>
             </a:fld>
-            <a:endParaRPr lang="en-US"/>
-          </a:p>
-        </p:txBody>
-      </p:sp>
-      <p:sp>
-        <p:nvSpPr>
-          <p:cNvPr id="4" name="Slide Image Placeholder 3"/>
+            <a:endParaRPr lang="ko-KR" altLang="en-US"/>
+          </a:p>
+        </p:txBody>
+      </p:sp>
+      <p:sp>
+        <p:nvSpPr>
+          <p:cNvPr id="4" name="슬라이드 이미지 개체 틀 3"/>
           <p:cNvSpPr>
             <a:spLocks noGrp="1" noRot="1" noChangeAspect="1"/>
           </p:cNvSpPr>
@@ -242,8 +261,8 @@
         </p:nvSpPr>
         <p:spPr>
           <a:xfrm>
-            <a:off x="1143000" y="685800"/>
-            <a:ext cx="4572000" cy="3429000"/>
+            <a:off x="685800" y="1143000"/>
+            <a:ext cx="5486400" cy="3086100"/>
           </a:xfrm>
           <a:prstGeom prst="rect">
             <a:avLst/>
@@ -259,13 +278,13 @@
           <a:bodyPr vert="horz" lIns="91440" tIns="45720" rIns="91440" bIns="45720" rtlCol="0" anchor="ctr"/>
           <a:lstStyle/>
           <a:p>
-            <a:endParaRPr lang="en-US"/>
-          </a:p>
-        </p:txBody>
-      </p:sp>
-      <p:sp>
-        <p:nvSpPr>
-          <p:cNvPr id="5" name="Notes Placeholder 4"/>
+            <a:endParaRPr lang="ko-KR" altLang="en-US"/>
+          </a:p>
+        </p:txBody>
+      </p:sp>
+      <p:sp>
+        <p:nvSpPr>
+          <p:cNvPr id="5" name="슬라이드 노트 개체 틀 4"/>
           <p:cNvSpPr>
             <a:spLocks noGrp="1"/>
           </p:cNvSpPr>
@@ -275,8 +294,8 @@
         </p:nvSpPr>
         <p:spPr>
           <a:xfrm>
-            <a:off x="685800" y="4343400"/>
-            <a:ext cx="5486400" cy="4114800"/>
+            <a:off x="685800" y="4400550"/>
+            <a:ext cx="5486400" cy="3600450"/>
           </a:xfrm>
           <a:prstGeom prst="rect">
             <a:avLst/>
@@ -288,44 +307,43 @@
           <a:p>
             <a:pPr lvl="0"/>
             <a:r>
-              <a:rPr lang="en-US" smtClean="0"/>
-              <a:t>Click to edit Master text styles</a:t>
+              <a:rPr lang="ko-KR" altLang="en-US"/>
+              <a:t>마스터 텍스트 스타일을 편집하려면 클릭</a:t>
             </a:r>
           </a:p>
           <a:p>
             <a:pPr lvl="1"/>
             <a:r>
-              <a:rPr lang="en-US" smtClean="0"/>
-              <a:t>Second level</a:t>
+              <a:rPr lang="ko-KR" altLang="en-US"/>
+              <a:t>두 번째 수준</a:t>
             </a:r>
           </a:p>
           <a:p>
             <a:pPr lvl="2"/>
             <a:r>
-              <a:rPr lang="en-US" smtClean="0"/>
-              <a:t>Third level</a:t>
+              <a:rPr lang="ko-KR" altLang="en-US"/>
+              <a:t>세 번째 수준</a:t>
             </a:r>
           </a:p>
           <a:p>
             <a:pPr lvl="3"/>
             <a:r>
-              <a:rPr lang="en-US" smtClean="0"/>
-              <a:t>Fourth level</a:t>
+              <a:rPr lang="ko-KR" altLang="en-US"/>
+              <a:t>네 번째 수준</a:t>
             </a:r>
           </a:p>
           <a:p>
             <a:pPr lvl="4"/>
             <a:r>
-              <a:rPr lang="en-US" smtClean="0"/>
-              <a:t>Fifth level</a:t>
-            </a:r>
-            <a:endParaRPr lang="en-US"/>
-          </a:p>
-        </p:txBody>
-      </p:sp>
-      <p:sp>
-        <p:nvSpPr>
-          <p:cNvPr id="6" name="Footer Placeholder 5"/>
+              <a:rPr lang="ko-KR" altLang="en-US"/>
+              <a:t>다섯 번째 수준</a:t>
+            </a:r>
+          </a:p>
+        </p:txBody>
+      </p:sp>
+      <p:sp>
+        <p:nvSpPr>
+          <p:cNvPr id="6" name="바닥글 개체 틀 5"/>
           <p:cNvSpPr>
             <a:spLocks noGrp="1"/>
           </p:cNvSpPr>
@@ -336,7 +354,7 @@
         <p:spPr>
           <a:xfrm>
             <a:off x="0" y="8685213"/>
-            <a:ext cx="2971800" cy="457200"/>
+            <a:ext cx="2971800" cy="458787"/>
           </a:xfrm>
           <a:prstGeom prst="rect">
             <a:avLst/>
@@ -350,13 +368,13 @@
             </a:lvl1pPr>
           </a:lstStyle>
           <a:p>
-            <a:endParaRPr lang="en-US"/>
-          </a:p>
-        </p:txBody>
-      </p:sp>
-      <p:sp>
-        <p:nvSpPr>
-          <p:cNvPr id="7" name="Slide Number Placeholder 6"/>
+            <a:endParaRPr lang="ko-KR" altLang="en-US"/>
+          </a:p>
+        </p:txBody>
+      </p:sp>
+      <p:sp>
+        <p:nvSpPr>
+          <p:cNvPr id="7" name="슬라이드 번호 개체 틀 6"/>
           <p:cNvSpPr>
             <a:spLocks noGrp="1"/>
           </p:cNvSpPr>
@@ -367,7 +385,7 @@
         <p:spPr>
           <a:xfrm>
             <a:off x="3884613" y="8685213"/>
-            <a:ext cx="2971800" cy="457200"/>
+            <a:ext cx="2971800" cy="458787"/>
           </a:xfrm>
           <a:prstGeom prst="rect">
             <a:avLst/>
@@ -381,24 +399,24 @@
             </a:lvl1pPr>
           </a:lstStyle>
           <a:p>
-            <a:fld id="{BB5E49A5-4136-284D-997B-48E1D791AD67}" type="slidenum">
-              <a:rPr lang="en-US" smtClean="0"/>
+            <a:fld id="{BA4B3843-21CC-44B3-8B4C-DC7BDC88963B}" type="slidenum">
+              <a:rPr lang="ko-KR" altLang="en-US" smtClean="0"/>
               <a:t>‹#›</a:t>
             </a:fld>
-            <a:endParaRPr lang="en-US"/>
+            <a:endParaRPr lang="ko-KR" altLang="en-US"/>
           </a:p>
         </p:txBody>
       </p:sp>
     </p:spTree>
     <p:extLst>
       <p:ext uri="{BB962C8B-B14F-4D97-AF65-F5344CB8AC3E}">
-        <p14:creationId xmlns:p14="http://schemas.microsoft.com/office/powerpoint/2010/main" val="2623252185"/>
+        <p14:creationId xmlns:p14="http://schemas.microsoft.com/office/powerpoint/2010/main" val="2216378188"/>
       </p:ext>
     </p:extLst>
   </p:cSld>
   <p:clrMap bg1="lt1" tx1="dk1" bg2="lt2" tx2="dk2" accent1="accent1" accent2="accent2" accent3="accent3" accent4="accent4" accent5="accent5" accent6="accent6" hlink="hlink" folHlink="folHlink"/>
   <p:notesStyle>
-    <a:lvl1pPr marL="0" algn="l" defTabSz="457200" rtl="0" eaLnBrk="1" latinLnBrk="0" hangingPunct="1">
+    <a:lvl1pPr marL="0" algn="l" defTabSz="914400" rtl="0" eaLnBrk="1" latinLnBrk="1" hangingPunct="1">
       <a:defRPr sz="1200" kern="1200">
         <a:solidFill>
           <a:schemeClr val="tx1"/>
@@ -408,7 +426,7 @@
         <a:cs typeface="+mn-cs"/>
       </a:defRPr>
     </a:lvl1pPr>
-    <a:lvl2pPr marL="457200" algn="l" defTabSz="457200" rtl="0" eaLnBrk="1" latinLnBrk="0" hangingPunct="1">
+    <a:lvl2pPr marL="457200" algn="l" defTabSz="914400" rtl="0" eaLnBrk="1" latinLnBrk="1" hangingPunct="1">
       <a:defRPr sz="1200" kern="1200">
         <a:solidFill>
           <a:schemeClr val="tx1"/>
@@ -418,7 +436,7 @@
         <a:cs typeface="+mn-cs"/>
       </a:defRPr>
     </a:lvl2pPr>
-    <a:lvl3pPr marL="914400" algn="l" defTabSz="457200" rtl="0" eaLnBrk="1" latinLnBrk="0" hangingPunct="1">
+    <a:lvl3pPr marL="914400" algn="l" defTabSz="914400" rtl="0" eaLnBrk="1" latinLnBrk="1" hangingPunct="1">
       <a:defRPr sz="1200" kern="1200">
         <a:solidFill>
           <a:schemeClr val="tx1"/>
@@ -428,7 +446,7 @@
         <a:cs typeface="+mn-cs"/>
       </a:defRPr>
     </a:lvl3pPr>
-    <a:lvl4pPr marL="1371600" algn="l" defTabSz="457200" rtl="0" eaLnBrk="1" latinLnBrk="0" hangingPunct="1">
+    <a:lvl4pPr marL="1371600" algn="l" defTabSz="914400" rtl="0" eaLnBrk="1" latinLnBrk="1" hangingPunct="1">
       <a:defRPr sz="1200" kern="1200">
         <a:solidFill>
           <a:schemeClr val="tx1"/>
@@ -438,7 +456,7 @@
         <a:cs typeface="+mn-cs"/>
       </a:defRPr>
     </a:lvl4pPr>
-    <a:lvl5pPr marL="1828800" algn="l" defTabSz="457200" rtl="0" eaLnBrk="1" latinLnBrk="0" hangingPunct="1">
+    <a:lvl5pPr marL="1828800" algn="l" defTabSz="914400" rtl="0" eaLnBrk="1" latinLnBrk="1" hangingPunct="1">
       <a:defRPr sz="1200" kern="1200">
         <a:solidFill>
           <a:schemeClr val="tx1"/>
@@ -448,7 +466,7 @@
         <a:cs typeface="+mn-cs"/>
       </a:defRPr>
     </a:lvl5pPr>
-    <a:lvl6pPr marL="2286000" algn="l" defTabSz="457200" rtl="0" eaLnBrk="1" latinLnBrk="0" hangingPunct="1">
+    <a:lvl6pPr marL="2286000" algn="l" defTabSz="914400" rtl="0" eaLnBrk="1" latinLnBrk="1" hangingPunct="1">
       <a:defRPr sz="1200" kern="1200">
         <a:solidFill>
           <a:schemeClr val="tx1"/>
@@ -458,7 +476,7 @@
         <a:cs typeface="+mn-cs"/>
       </a:defRPr>
     </a:lvl6pPr>
-    <a:lvl7pPr marL="2743200" algn="l" defTabSz="457200" rtl="0" eaLnBrk="1" latinLnBrk="0" hangingPunct="1">
+    <a:lvl7pPr marL="2743200" algn="l" defTabSz="914400" rtl="0" eaLnBrk="1" latinLnBrk="1" hangingPunct="1">
       <a:defRPr sz="1200" kern="1200">
         <a:solidFill>
           <a:schemeClr val="tx1"/>
@@ -468,7 +486,7 @@
         <a:cs typeface="+mn-cs"/>
       </a:defRPr>
     </a:lvl7pPr>
-    <a:lvl8pPr marL="3200400" algn="l" defTabSz="457200" rtl="0" eaLnBrk="1" latinLnBrk="0" hangingPunct="1">
+    <a:lvl8pPr marL="3200400" algn="l" defTabSz="914400" rtl="0" eaLnBrk="1" latinLnBrk="1" hangingPunct="1">
       <a:defRPr sz="1200" kern="1200">
         <a:solidFill>
           <a:schemeClr val="tx1"/>
@@ -478,7 +496,7 @@
         <a:cs typeface="+mn-cs"/>
       </a:defRPr>
     </a:lvl8pPr>
-    <a:lvl9pPr marL="3657600" algn="l" defTabSz="457200" rtl="0" eaLnBrk="1" latinLnBrk="0" hangingPunct="1">
+    <a:lvl9pPr marL="3657600" algn="l" defTabSz="914400" rtl="0" eaLnBrk="1" latinLnBrk="1" hangingPunct="1">
       <a:defRPr sz="1200" kern="1200">
         <a:solidFill>
           <a:schemeClr val="tx1"/>
@@ -493,7 +511,7 @@
 </file>
 
 <file path=ppt/notesSlides/notesSlide1.xml><?xml version="1.0" encoding="utf-8"?>
-<p:notes xmlns:a="http://schemas.openxmlformats.org/drawingml/2006/main" xmlns:p="http://schemas.openxmlformats.org/presentationml/2006/main" xmlns:r="http://schemas.openxmlformats.org/officeDocument/2006/relationships">
+<p:notes xmlns:a="http://schemas.openxmlformats.org/drawingml/2006/main" xmlns:r="http://schemas.openxmlformats.org/officeDocument/2006/relationships" xmlns:p="http://schemas.openxmlformats.org/presentationml/2006/main">
   <p:cSld>
     <p:spTree>
       <p:nvGrpSpPr>
@@ -513,7 +531,7 @@
         <p:nvSpPr>
           <p:cNvPr id="2" name="Slide Image Placeholder 1"/>
           <p:cNvSpPr>
-            <a:spLocks noGrp="1"/>
+            <a:spLocks noGrp="1" noRot="1" noChangeAspect="1"/>
           </p:cNvSpPr>
           <p:nvPr>
             <p:ph type="sldImg" idx="2"/>
@@ -528,7 +546,7 @@
             <a:spLocks noGrp="1"/>
           </p:cNvSpPr>
           <p:nvPr>
-            <p:ph type="body" idx="3" sz="quarter"/>
+            <p:ph type="body" sz="quarter" idx="3"/>
           </p:nvPr>
         </p:nvSpPr>
         <p:spPr/>
@@ -549,7 +567,7 @@
             <a:spLocks noGrp="1"/>
           </p:cNvSpPr>
           <p:nvPr>
-            <p:ph type="sldNum" idx="5" sz="quarter"/>
+            <p:ph type="sldNum" sz="quarter" idx="5"/>
           </p:nvPr>
         </p:nvSpPr>
         <p:spPr/>
@@ -563,7 +581,7 @@
 </file>
 
 <file path=ppt/notesSlides/notesSlide10.xml><?xml version="1.0" encoding="utf-8"?>
-<p:notes xmlns:a="http://schemas.openxmlformats.org/drawingml/2006/main" xmlns:p="http://schemas.openxmlformats.org/presentationml/2006/main" xmlns:r="http://schemas.openxmlformats.org/officeDocument/2006/relationships">
+<p:notes xmlns:a="http://schemas.openxmlformats.org/drawingml/2006/main" xmlns:r="http://schemas.openxmlformats.org/officeDocument/2006/relationships" xmlns:p="http://schemas.openxmlformats.org/presentationml/2006/main">
   <p:cSld>
     <p:spTree>
       <p:nvGrpSpPr>
@@ -583,7 +601,7 @@
         <p:nvSpPr>
           <p:cNvPr id="2" name="Slide Image Placeholder 1"/>
           <p:cNvSpPr>
-            <a:spLocks noGrp="1"/>
+            <a:spLocks noGrp="1" noRot="1" noChangeAspect="1"/>
           </p:cNvSpPr>
           <p:nvPr>
             <p:ph type="sldImg" idx="2"/>
@@ -598,7 +616,7 @@
             <a:spLocks noGrp="1"/>
           </p:cNvSpPr>
           <p:nvPr>
-            <p:ph type="body" idx="3" sz="quarter"/>
+            <p:ph type="body" sz="quarter" idx="3"/>
           </p:nvPr>
         </p:nvSpPr>
         <p:spPr/>
@@ -619,7 +637,7 @@
             <a:spLocks noGrp="1"/>
           </p:cNvSpPr>
           <p:nvPr>
-            <p:ph type="sldNum" idx="5" sz="quarter"/>
+            <p:ph type="sldNum" sz="quarter" idx="5"/>
           </p:nvPr>
         </p:nvSpPr>
         <p:spPr/>
@@ -633,7 +651,7 @@
 </file>
 
 <file path=ppt/notesSlides/notesSlide11.xml><?xml version="1.0" encoding="utf-8"?>
-<p:notes xmlns:a="http://schemas.openxmlformats.org/drawingml/2006/main" xmlns:p="http://schemas.openxmlformats.org/presentationml/2006/main" xmlns:r="http://schemas.openxmlformats.org/officeDocument/2006/relationships">
+<p:notes xmlns:a="http://schemas.openxmlformats.org/drawingml/2006/main" xmlns:r="http://schemas.openxmlformats.org/officeDocument/2006/relationships" xmlns:p="http://schemas.openxmlformats.org/presentationml/2006/main">
   <p:cSld>
     <p:spTree>
       <p:nvGrpSpPr>
@@ -653,7 +671,7 @@
         <p:nvSpPr>
           <p:cNvPr id="2" name="Slide Image Placeholder 1"/>
           <p:cNvSpPr>
-            <a:spLocks noGrp="1"/>
+            <a:spLocks noGrp="1" noRot="1" noChangeAspect="1"/>
           </p:cNvSpPr>
           <p:nvPr>
             <p:ph type="sldImg" idx="2"/>
@@ -668,7 +686,7 @@
             <a:spLocks noGrp="1"/>
           </p:cNvSpPr>
           <p:nvPr>
-            <p:ph type="body" idx="3" sz="quarter"/>
+            <p:ph type="body" sz="quarter" idx="3"/>
           </p:nvPr>
         </p:nvSpPr>
         <p:spPr/>
@@ -689,7 +707,7 @@
             <a:spLocks noGrp="1"/>
           </p:cNvSpPr>
           <p:nvPr>
-            <p:ph type="sldNum" idx="5" sz="quarter"/>
+            <p:ph type="sldNum" sz="quarter" idx="5"/>
           </p:nvPr>
         </p:nvSpPr>
         <p:spPr/>
@@ -703,7 +721,7 @@
 </file>
 
 <file path=ppt/notesSlides/notesSlide12.xml><?xml version="1.0" encoding="utf-8"?>
-<p:notes xmlns:a="http://schemas.openxmlformats.org/drawingml/2006/main" xmlns:p="http://schemas.openxmlformats.org/presentationml/2006/main" xmlns:r="http://schemas.openxmlformats.org/officeDocument/2006/relationships">
+<p:notes xmlns:a="http://schemas.openxmlformats.org/drawingml/2006/main" xmlns:r="http://schemas.openxmlformats.org/officeDocument/2006/relationships" xmlns:p="http://schemas.openxmlformats.org/presentationml/2006/main">
   <p:cSld>
     <p:spTree>
       <p:nvGrpSpPr>
@@ -723,7 +741,7 @@
         <p:nvSpPr>
           <p:cNvPr id="2" name="Slide Image Placeholder 1"/>
           <p:cNvSpPr>
-            <a:spLocks noGrp="1"/>
+            <a:spLocks noGrp="1" noRot="1" noChangeAspect="1"/>
           </p:cNvSpPr>
           <p:nvPr>
             <p:ph type="sldImg" idx="2"/>
@@ -738,7 +756,7 @@
             <a:spLocks noGrp="1"/>
           </p:cNvSpPr>
           <p:nvPr>
-            <p:ph type="body" idx="3" sz="quarter"/>
+            <p:ph type="body" sz="quarter" idx="3"/>
           </p:nvPr>
         </p:nvSpPr>
         <p:spPr/>
@@ -759,7 +777,7 @@
             <a:spLocks noGrp="1"/>
           </p:cNvSpPr>
           <p:nvPr>
-            <p:ph type="sldNum" idx="5" sz="quarter"/>
+            <p:ph type="sldNum" sz="quarter" idx="5"/>
           </p:nvPr>
         </p:nvSpPr>
         <p:spPr/>
@@ -773,7 +791,7 @@
 </file>
 
 <file path=ppt/notesSlides/notesSlide13.xml><?xml version="1.0" encoding="utf-8"?>
-<p:notes xmlns:a="http://schemas.openxmlformats.org/drawingml/2006/main" xmlns:p="http://schemas.openxmlformats.org/presentationml/2006/main" xmlns:r="http://schemas.openxmlformats.org/officeDocument/2006/relationships">
+<p:notes xmlns:a="http://schemas.openxmlformats.org/drawingml/2006/main" xmlns:r="http://schemas.openxmlformats.org/officeDocument/2006/relationships" xmlns:p="http://schemas.openxmlformats.org/presentationml/2006/main">
   <p:cSld>
     <p:spTree>
       <p:nvGrpSpPr>
@@ -793,7 +811,7 @@
         <p:nvSpPr>
           <p:cNvPr id="2" name="Slide Image Placeholder 1"/>
           <p:cNvSpPr>
-            <a:spLocks noGrp="1"/>
+            <a:spLocks noGrp="1" noRot="1" noChangeAspect="1"/>
           </p:cNvSpPr>
           <p:nvPr>
             <p:ph type="sldImg" idx="2"/>
@@ -808,7 +826,7 @@
             <a:spLocks noGrp="1"/>
           </p:cNvSpPr>
           <p:nvPr>
-            <p:ph type="body" idx="3" sz="quarter"/>
+            <p:ph type="body" sz="quarter" idx="3"/>
           </p:nvPr>
         </p:nvSpPr>
         <p:spPr/>
@@ -829,7 +847,7 @@
             <a:spLocks noGrp="1"/>
           </p:cNvSpPr>
           <p:nvPr>
-            <p:ph type="sldNum" idx="5" sz="quarter"/>
+            <p:ph type="sldNum" sz="quarter" idx="5"/>
           </p:nvPr>
         </p:nvSpPr>
         <p:spPr/>
@@ -843,7 +861,7 @@
 </file>
 
 <file path=ppt/notesSlides/notesSlide14.xml><?xml version="1.0" encoding="utf-8"?>
-<p:notes xmlns:a="http://schemas.openxmlformats.org/drawingml/2006/main" xmlns:p="http://schemas.openxmlformats.org/presentationml/2006/main" xmlns:r="http://schemas.openxmlformats.org/officeDocument/2006/relationships">
+<p:notes xmlns:a="http://schemas.openxmlformats.org/drawingml/2006/main" xmlns:r="http://schemas.openxmlformats.org/officeDocument/2006/relationships" xmlns:p="http://schemas.openxmlformats.org/presentationml/2006/main">
   <p:cSld>
     <p:spTree>
       <p:nvGrpSpPr>
@@ -863,7 +881,7 @@
         <p:nvSpPr>
           <p:cNvPr id="2" name="Slide Image Placeholder 1"/>
           <p:cNvSpPr>
-            <a:spLocks noGrp="1"/>
+            <a:spLocks noGrp="1" noRot="1" noChangeAspect="1"/>
           </p:cNvSpPr>
           <p:nvPr>
             <p:ph type="sldImg" idx="2"/>
@@ -878,7 +896,7 @@
             <a:spLocks noGrp="1"/>
           </p:cNvSpPr>
           <p:nvPr>
-            <p:ph type="body" idx="3" sz="quarter"/>
+            <p:ph type="body" sz="quarter" idx="3"/>
           </p:nvPr>
         </p:nvSpPr>
         <p:spPr/>
@@ -899,7 +917,7 @@
             <a:spLocks noGrp="1"/>
           </p:cNvSpPr>
           <p:nvPr>
-            <p:ph type="sldNum" idx="5" sz="quarter"/>
+            <p:ph type="sldNum" sz="quarter" idx="5"/>
           </p:nvPr>
         </p:nvSpPr>
         <p:spPr/>
@@ -913,7 +931,7 @@
 </file>
 
 <file path=ppt/notesSlides/notesSlide15.xml><?xml version="1.0" encoding="utf-8"?>
-<p:notes xmlns:a="http://schemas.openxmlformats.org/drawingml/2006/main" xmlns:p="http://schemas.openxmlformats.org/presentationml/2006/main" xmlns:r="http://schemas.openxmlformats.org/officeDocument/2006/relationships">
+<p:notes xmlns:a="http://schemas.openxmlformats.org/drawingml/2006/main" xmlns:r="http://schemas.openxmlformats.org/officeDocument/2006/relationships" xmlns:p="http://schemas.openxmlformats.org/presentationml/2006/main">
   <p:cSld>
     <p:spTree>
       <p:nvGrpSpPr>
@@ -933,7 +951,7 @@
         <p:nvSpPr>
           <p:cNvPr id="2" name="Slide Image Placeholder 1"/>
           <p:cNvSpPr>
-            <a:spLocks noGrp="1"/>
+            <a:spLocks noGrp="1" noRot="1" noChangeAspect="1"/>
           </p:cNvSpPr>
           <p:nvPr>
             <p:ph type="sldImg" idx="2"/>
@@ -948,7 +966,7 @@
             <a:spLocks noGrp="1"/>
           </p:cNvSpPr>
           <p:nvPr>
-            <p:ph type="body" idx="3" sz="quarter"/>
+            <p:ph type="body" sz="quarter" idx="3"/>
           </p:nvPr>
         </p:nvSpPr>
         <p:spPr/>
@@ -969,7 +987,7 @@
             <a:spLocks noGrp="1"/>
           </p:cNvSpPr>
           <p:nvPr>
-            <p:ph type="sldNum" idx="5" sz="quarter"/>
+            <p:ph type="sldNum" sz="quarter" idx="5"/>
           </p:nvPr>
         </p:nvSpPr>
         <p:spPr/>
@@ -983,7 +1001,7 @@
 </file>
 
 <file path=ppt/notesSlides/notesSlide16.xml><?xml version="1.0" encoding="utf-8"?>
-<p:notes xmlns:a="http://schemas.openxmlformats.org/drawingml/2006/main" xmlns:p="http://schemas.openxmlformats.org/presentationml/2006/main" xmlns:r="http://schemas.openxmlformats.org/officeDocument/2006/relationships">
+<p:notes xmlns:a="http://schemas.openxmlformats.org/drawingml/2006/main" xmlns:r="http://schemas.openxmlformats.org/officeDocument/2006/relationships" xmlns:p="http://schemas.openxmlformats.org/presentationml/2006/main">
   <p:cSld>
     <p:spTree>
       <p:nvGrpSpPr>
@@ -1003,7 +1021,7 @@
         <p:nvSpPr>
           <p:cNvPr id="2" name="Slide Image Placeholder 1"/>
           <p:cNvSpPr>
-            <a:spLocks noGrp="1"/>
+            <a:spLocks noGrp="1" noRot="1" noChangeAspect="1"/>
           </p:cNvSpPr>
           <p:nvPr>
             <p:ph type="sldImg" idx="2"/>
@@ -1018,7 +1036,7 @@
             <a:spLocks noGrp="1"/>
           </p:cNvSpPr>
           <p:nvPr>
-            <p:ph type="body" idx="3" sz="quarter"/>
+            <p:ph type="body" sz="quarter" idx="3"/>
           </p:nvPr>
         </p:nvSpPr>
         <p:spPr/>
@@ -1039,7 +1057,7 @@
             <a:spLocks noGrp="1"/>
           </p:cNvSpPr>
           <p:nvPr>
-            <p:ph type="sldNum" idx="5" sz="quarter"/>
+            <p:ph type="sldNum" sz="quarter" idx="5"/>
           </p:nvPr>
         </p:nvSpPr>
         <p:spPr/>
@@ -1053,7 +1071,7 @@
 </file>
 
 <file path=ppt/notesSlides/notesSlide17.xml><?xml version="1.0" encoding="utf-8"?>
-<p:notes xmlns:a="http://schemas.openxmlformats.org/drawingml/2006/main" xmlns:p="http://schemas.openxmlformats.org/presentationml/2006/main" xmlns:r="http://schemas.openxmlformats.org/officeDocument/2006/relationships">
+<p:notes xmlns:a="http://schemas.openxmlformats.org/drawingml/2006/main" xmlns:r="http://schemas.openxmlformats.org/officeDocument/2006/relationships" xmlns:p="http://schemas.openxmlformats.org/presentationml/2006/main">
   <p:cSld>
     <p:spTree>
       <p:nvGrpSpPr>
@@ -1073,7 +1091,7 @@
         <p:nvSpPr>
           <p:cNvPr id="2" name="Slide Image Placeholder 1"/>
           <p:cNvSpPr>
-            <a:spLocks noGrp="1"/>
+            <a:spLocks noGrp="1" noRot="1" noChangeAspect="1"/>
           </p:cNvSpPr>
           <p:nvPr>
             <p:ph type="sldImg" idx="2"/>
@@ -1088,7 +1106,7 @@
             <a:spLocks noGrp="1"/>
           </p:cNvSpPr>
           <p:nvPr>
-            <p:ph type="body" idx="3" sz="quarter"/>
+            <p:ph type="body" sz="quarter" idx="3"/>
           </p:nvPr>
         </p:nvSpPr>
         <p:spPr/>
@@ -1109,7 +1127,7 @@
             <a:spLocks noGrp="1"/>
           </p:cNvSpPr>
           <p:nvPr>
-            <p:ph type="sldNum" idx="5" sz="quarter"/>
+            <p:ph type="sldNum" sz="quarter" idx="5"/>
           </p:nvPr>
         </p:nvSpPr>
         <p:spPr/>
@@ -1123,7 +1141,7 @@
 </file>
 
 <file path=ppt/notesSlides/notesSlide18.xml><?xml version="1.0" encoding="utf-8"?>
-<p:notes xmlns:a="http://schemas.openxmlformats.org/drawingml/2006/main" xmlns:p="http://schemas.openxmlformats.org/presentationml/2006/main" xmlns:r="http://schemas.openxmlformats.org/officeDocument/2006/relationships">
+<p:notes xmlns:a="http://schemas.openxmlformats.org/drawingml/2006/main" xmlns:r="http://schemas.openxmlformats.org/officeDocument/2006/relationships" xmlns:p="http://schemas.openxmlformats.org/presentationml/2006/main">
   <p:cSld>
     <p:spTree>
       <p:nvGrpSpPr>
@@ -1143,7 +1161,7 @@
         <p:nvSpPr>
           <p:cNvPr id="2" name="Slide Image Placeholder 1"/>
           <p:cNvSpPr>
-            <a:spLocks noGrp="1"/>
+            <a:spLocks noGrp="1" noRot="1" noChangeAspect="1"/>
           </p:cNvSpPr>
           <p:nvPr>
             <p:ph type="sldImg" idx="2"/>
@@ -1158,7 +1176,7 @@
             <a:spLocks noGrp="1"/>
           </p:cNvSpPr>
           <p:nvPr>
-            <p:ph type="body" idx="3" sz="quarter"/>
+            <p:ph type="body" sz="quarter" idx="3"/>
           </p:nvPr>
         </p:nvSpPr>
         <p:spPr/>
@@ -1179,7 +1197,7 @@
             <a:spLocks noGrp="1"/>
           </p:cNvSpPr>
           <p:nvPr>
-            <p:ph type="sldNum" idx="5" sz="quarter"/>
+            <p:ph type="sldNum" sz="quarter" idx="5"/>
           </p:nvPr>
         </p:nvSpPr>
         <p:spPr/>
@@ -1193,7 +1211,7 @@
 </file>
 
 <file path=ppt/notesSlides/notesSlide19.xml><?xml version="1.0" encoding="utf-8"?>
-<p:notes xmlns:a="http://schemas.openxmlformats.org/drawingml/2006/main" xmlns:p="http://schemas.openxmlformats.org/presentationml/2006/main" xmlns:r="http://schemas.openxmlformats.org/officeDocument/2006/relationships">
+<p:notes xmlns:a="http://schemas.openxmlformats.org/drawingml/2006/main" xmlns:r="http://schemas.openxmlformats.org/officeDocument/2006/relationships" xmlns:p="http://schemas.openxmlformats.org/presentationml/2006/main">
   <p:cSld>
     <p:spTree>
       <p:nvGrpSpPr>
@@ -1213,7 +1231,7 @@
         <p:nvSpPr>
           <p:cNvPr id="2" name="Slide Image Placeholder 1"/>
           <p:cNvSpPr>
-            <a:spLocks noGrp="1"/>
+            <a:spLocks noGrp="1" noRot="1" noChangeAspect="1"/>
           </p:cNvSpPr>
           <p:nvPr>
             <p:ph type="sldImg" idx="2"/>
@@ -1228,7 +1246,7 @@
             <a:spLocks noGrp="1"/>
           </p:cNvSpPr>
           <p:nvPr>
-            <p:ph type="body" idx="3" sz="quarter"/>
+            <p:ph type="body" sz="quarter" idx="3"/>
           </p:nvPr>
         </p:nvSpPr>
         <p:spPr/>
@@ -1249,7 +1267,7 @@
             <a:spLocks noGrp="1"/>
           </p:cNvSpPr>
           <p:nvPr>
-            <p:ph type="sldNum" idx="5" sz="quarter"/>
+            <p:ph type="sldNum" sz="quarter" idx="5"/>
           </p:nvPr>
         </p:nvSpPr>
         <p:spPr/>
@@ -1263,7 +1281,7 @@
 </file>
 
 <file path=ppt/notesSlides/notesSlide2.xml><?xml version="1.0" encoding="utf-8"?>
-<p:notes xmlns:a="http://schemas.openxmlformats.org/drawingml/2006/main" xmlns:p="http://schemas.openxmlformats.org/presentationml/2006/main" xmlns:r="http://schemas.openxmlformats.org/officeDocument/2006/relationships">
+<p:notes xmlns:a="http://schemas.openxmlformats.org/drawingml/2006/main" xmlns:r="http://schemas.openxmlformats.org/officeDocument/2006/relationships" xmlns:p="http://schemas.openxmlformats.org/presentationml/2006/main">
   <p:cSld>
     <p:spTree>
       <p:nvGrpSpPr>
@@ -1283,7 +1301,7 @@
         <p:nvSpPr>
           <p:cNvPr id="2" name="Slide Image Placeholder 1"/>
           <p:cNvSpPr>
-            <a:spLocks noGrp="1"/>
+            <a:spLocks noGrp="1" noRot="1" noChangeAspect="1"/>
           </p:cNvSpPr>
           <p:nvPr>
             <p:ph type="sldImg" idx="2"/>
@@ -1298,7 +1316,7 @@
             <a:spLocks noGrp="1"/>
           </p:cNvSpPr>
           <p:nvPr>
-            <p:ph type="body" idx="3" sz="quarter"/>
+            <p:ph type="body" sz="quarter" idx="3"/>
           </p:nvPr>
         </p:nvSpPr>
         <p:spPr/>
@@ -1319,7 +1337,7 @@
             <a:spLocks noGrp="1"/>
           </p:cNvSpPr>
           <p:nvPr>
-            <p:ph type="sldNum" idx="5" sz="quarter"/>
+            <p:ph type="sldNum" sz="quarter" idx="5"/>
           </p:nvPr>
         </p:nvSpPr>
         <p:spPr/>
@@ -1333,7 +1351,7 @@
 </file>
 
 <file path=ppt/notesSlides/notesSlide20.xml><?xml version="1.0" encoding="utf-8"?>
-<p:notes xmlns:a="http://schemas.openxmlformats.org/drawingml/2006/main" xmlns:p="http://schemas.openxmlformats.org/presentationml/2006/main" xmlns:r="http://schemas.openxmlformats.org/officeDocument/2006/relationships">
+<p:notes xmlns:a="http://schemas.openxmlformats.org/drawingml/2006/main" xmlns:r="http://schemas.openxmlformats.org/officeDocument/2006/relationships" xmlns:p="http://schemas.openxmlformats.org/presentationml/2006/main">
   <p:cSld>
     <p:spTree>
       <p:nvGrpSpPr>
@@ -1353,7 +1371,7 @@
         <p:nvSpPr>
           <p:cNvPr id="2" name="Slide Image Placeholder 1"/>
           <p:cNvSpPr>
-            <a:spLocks noGrp="1"/>
+            <a:spLocks noGrp="1" noRot="1" noChangeAspect="1"/>
           </p:cNvSpPr>
           <p:nvPr>
             <p:ph type="sldImg" idx="2"/>
@@ -1368,7 +1386,7 @@
             <a:spLocks noGrp="1"/>
           </p:cNvSpPr>
           <p:nvPr>
-            <p:ph type="body" idx="3" sz="quarter"/>
+            <p:ph type="body" sz="quarter" idx="3"/>
           </p:nvPr>
         </p:nvSpPr>
         <p:spPr/>
@@ -1389,7 +1407,7 @@
             <a:spLocks noGrp="1"/>
           </p:cNvSpPr>
           <p:nvPr>
-            <p:ph type="sldNum" idx="5" sz="quarter"/>
+            <p:ph type="sldNum" sz="quarter" idx="5"/>
           </p:nvPr>
         </p:nvSpPr>
         <p:spPr/>
@@ -1403,7 +1421,7 @@
 </file>
 
 <file path=ppt/notesSlides/notesSlide21.xml><?xml version="1.0" encoding="utf-8"?>
-<p:notes xmlns:a="http://schemas.openxmlformats.org/drawingml/2006/main" xmlns:p="http://schemas.openxmlformats.org/presentationml/2006/main" xmlns:r="http://schemas.openxmlformats.org/officeDocument/2006/relationships">
+<p:notes xmlns:a="http://schemas.openxmlformats.org/drawingml/2006/main" xmlns:r="http://schemas.openxmlformats.org/officeDocument/2006/relationships" xmlns:p="http://schemas.openxmlformats.org/presentationml/2006/main">
   <p:cSld>
     <p:spTree>
       <p:nvGrpSpPr>
@@ -1423,7 +1441,7 @@
         <p:nvSpPr>
           <p:cNvPr id="2" name="Slide Image Placeholder 1"/>
           <p:cNvSpPr>
-            <a:spLocks noGrp="1"/>
+            <a:spLocks noGrp="1" noRot="1" noChangeAspect="1"/>
           </p:cNvSpPr>
           <p:nvPr>
             <p:ph type="sldImg" idx="2"/>
@@ -1438,7 +1456,7 @@
             <a:spLocks noGrp="1"/>
           </p:cNvSpPr>
           <p:nvPr>
-            <p:ph type="body" idx="3" sz="quarter"/>
+            <p:ph type="body" sz="quarter" idx="3"/>
           </p:nvPr>
         </p:nvSpPr>
         <p:spPr/>
@@ -1459,7 +1477,7 @@
             <a:spLocks noGrp="1"/>
           </p:cNvSpPr>
           <p:nvPr>
-            <p:ph type="sldNum" idx="5" sz="quarter"/>
+            <p:ph type="sldNum" sz="quarter" idx="5"/>
           </p:nvPr>
         </p:nvSpPr>
         <p:spPr/>
@@ -1473,7 +1491,7 @@
 </file>
 
 <file path=ppt/notesSlides/notesSlide22.xml><?xml version="1.0" encoding="utf-8"?>
-<p:notes xmlns:a="http://schemas.openxmlformats.org/drawingml/2006/main" xmlns:p="http://schemas.openxmlformats.org/presentationml/2006/main" xmlns:r="http://schemas.openxmlformats.org/officeDocument/2006/relationships">
+<p:notes xmlns:a="http://schemas.openxmlformats.org/drawingml/2006/main" xmlns:r="http://schemas.openxmlformats.org/officeDocument/2006/relationships" xmlns:p="http://schemas.openxmlformats.org/presentationml/2006/main">
   <p:cSld>
     <p:spTree>
       <p:nvGrpSpPr>
@@ -1493,7 +1511,7 @@
         <p:nvSpPr>
           <p:cNvPr id="2" name="Slide Image Placeholder 1"/>
           <p:cNvSpPr>
-            <a:spLocks noGrp="1"/>
+            <a:spLocks noGrp="1" noRot="1" noChangeAspect="1"/>
           </p:cNvSpPr>
           <p:nvPr>
             <p:ph type="sldImg" idx="2"/>
@@ -1508,7 +1526,7 @@
             <a:spLocks noGrp="1"/>
           </p:cNvSpPr>
           <p:nvPr>
-            <p:ph type="body" idx="3" sz="quarter"/>
+            <p:ph type="body" sz="quarter" idx="3"/>
           </p:nvPr>
         </p:nvSpPr>
         <p:spPr/>
@@ -1529,7 +1547,7 @@
             <a:spLocks noGrp="1"/>
           </p:cNvSpPr>
           <p:nvPr>
-            <p:ph type="sldNum" idx="5" sz="quarter"/>
+            <p:ph type="sldNum" sz="quarter" idx="5"/>
           </p:nvPr>
         </p:nvSpPr>
         <p:spPr/>
@@ -1543,7 +1561,7 @@
 </file>
 
 <file path=ppt/notesSlides/notesSlide23.xml><?xml version="1.0" encoding="utf-8"?>
-<p:notes xmlns:a="http://schemas.openxmlformats.org/drawingml/2006/main" xmlns:p="http://schemas.openxmlformats.org/presentationml/2006/main" xmlns:r="http://schemas.openxmlformats.org/officeDocument/2006/relationships">
+<p:notes xmlns:a="http://schemas.openxmlformats.org/drawingml/2006/main" xmlns:r="http://schemas.openxmlformats.org/officeDocument/2006/relationships" xmlns:p="http://schemas.openxmlformats.org/presentationml/2006/main">
   <p:cSld>
     <p:spTree>
       <p:nvGrpSpPr>
@@ -1563,7 +1581,7 @@
         <p:nvSpPr>
           <p:cNvPr id="2" name="Slide Image Placeholder 1"/>
           <p:cNvSpPr>
-            <a:spLocks noGrp="1"/>
+            <a:spLocks noGrp="1" noRot="1" noChangeAspect="1"/>
           </p:cNvSpPr>
           <p:nvPr>
             <p:ph type="sldImg" idx="2"/>
@@ -1578,7 +1596,7 @@
             <a:spLocks noGrp="1"/>
           </p:cNvSpPr>
           <p:nvPr>
-            <p:ph type="body" idx="3" sz="quarter"/>
+            <p:ph type="body" sz="quarter" idx="3"/>
           </p:nvPr>
         </p:nvSpPr>
         <p:spPr/>
@@ -1599,7 +1617,7 @@
             <a:spLocks noGrp="1"/>
           </p:cNvSpPr>
           <p:nvPr>
-            <p:ph type="sldNum" idx="5" sz="quarter"/>
+            <p:ph type="sldNum" sz="quarter" idx="5"/>
           </p:nvPr>
         </p:nvSpPr>
         <p:spPr/>
@@ -1613,7 +1631,7 @@
 </file>
 
 <file path=ppt/notesSlides/notesSlide3.xml><?xml version="1.0" encoding="utf-8"?>
-<p:notes xmlns:a="http://schemas.openxmlformats.org/drawingml/2006/main" xmlns:p="http://schemas.openxmlformats.org/presentationml/2006/main" xmlns:r="http://schemas.openxmlformats.org/officeDocument/2006/relationships">
+<p:notes xmlns:a="http://schemas.openxmlformats.org/drawingml/2006/main" xmlns:r="http://schemas.openxmlformats.org/officeDocument/2006/relationships" xmlns:p="http://schemas.openxmlformats.org/presentationml/2006/main">
   <p:cSld>
     <p:spTree>
       <p:nvGrpSpPr>
@@ -1633,7 +1651,7 @@
         <p:nvSpPr>
           <p:cNvPr id="2" name="Slide Image Placeholder 1"/>
           <p:cNvSpPr>
-            <a:spLocks noGrp="1"/>
+            <a:spLocks noGrp="1" noRot="1" noChangeAspect="1"/>
           </p:cNvSpPr>
           <p:nvPr>
             <p:ph type="sldImg" idx="2"/>
@@ -1648,7 +1666,7 @@
             <a:spLocks noGrp="1"/>
           </p:cNvSpPr>
           <p:nvPr>
-            <p:ph type="body" idx="3" sz="quarter"/>
+            <p:ph type="body" sz="quarter" idx="3"/>
           </p:nvPr>
         </p:nvSpPr>
         <p:spPr/>
@@ -1669,7 +1687,7 @@
             <a:spLocks noGrp="1"/>
           </p:cNvSpPr>
           <p:nvPr>
-            <p:ph type="sldNum" idx="5" sz="quarter"/>
+            <p:ph type="sldNum" sz="quarter" idx="5"/>
           </p:nvPr>
         </p:nvSpPr>
         <p:spPr/>
@@ -1683,7 +1701,7 @@
 </file>
 
 <file path=ppt/notesSlides/notesSlide4.xml><?xml version="1.0" encoding="utf-8"?>
-<p:notes xmlns:a="http://schemas.openxmlformats.org/drawingml/2006/main" xmlns:p="http://schemas.openxmlformats.org/presentationml/2006/main" xmlns:r="http://schemas.openxmlformats.org/officeDocument/2006/relationships">
+<p:notes xmlns:a="http://schemas.openxmlformats.org/drawingml/2006/main" xmlns:r="http://schemas.openxmlformats.org/officeDocument/2006/relationships" xmlns:p="http://schemas.openxmlformats.org/presentationml/2006/main">
   <p:cSld>
     <p:spTree>
       <p:nvGrpSpPr>
@@ -1703,7 +1721,7 @@
         <p:nvSpPr>
           <p:cNvPr id="2" name="Slide Image Placeholder 1"/>
           <p:cNvSpPr>
-            <a:spLocks noGrp="1"/>
+            <a:spLocks noGrp="1" noRot="1" noChangeAspect="1"/>
           </p:cNvSpPr>
           <p:nvPr>
             <p:ph type="sldImg" idx="2"/>
@@ -1718,7 +1736,7 @@
             <a:spLocks noGrp="1"/>
           </p:cNvSpPr>
           <p:nvPr>
-            <p:ph type="body" idx="3" sz="quarter"/>
+            <p:ph type="body" sz="quarter" idx="3"/>
           </p:nvPr>
         </p:nvSpPr>
         <p:spPr/>
@@ -1739,7 +1757,7 @@
             <a:spLocks noGrp="1"/>
           </p:cNvSpPr>
           <p:nvPr>
-            <p:ph type="sldNum" idx="5" sz="quarter"/>
+            <p:ph type="sldNum" sz="quarter" idx="5"/>
           </p:nvPr>
         </p:nvSpPr>
         <p:spPr/>
@@ -1753,7 +1771,7 @@
 </file>
 
 <file path=ppt/notesSlides/notesSlide5.xml><?xml version="1.0" encoding="utf-8"?>
-<p:notes xmlns:a="http://schemas.openxmlformats.org/drawingml/2006/main" xmlns:p="http://schemas.openxmlformats.org/presentationml/2006/main" xmlns:r="http://schemas.openxmlformats.org/officeDocument/2006/relationships">
+<p:notes xmlns:a="http://schemas.openxmlformats.org/drawingml/2006/main" xmlns:r="http://schemas.openxmlformats.org/officeDocument/2006/relationships" xmlns:p="http://schemas.openxmlformats.org/presentationml/2006/main">
   <p:cSld>
     <p:spTree>
       <p:nvGrpSpPr>
@@ -1773,7 +1791,7 @@
         <p:nvSpPr>
           <p:cNvPr id="2" name="Slide Image Placeholder 1"/>
           <p:cNvSpPr>
-            <a:spLocks noGrp="1"/>
+            <a:spLocks noGrp="1" noRot="1" noChangeAspect="1"/>
           </p:cNvSpPr>
           <p:nvPr>
             <p:ph type="sldImg" idx="2"/>
@@ -1788,7 +1806,7 @@
             <a:spLocks noGrp="1"/>
           </p:cNvSpPr>
           <p:nvPr>
-            <p:ph type="body" idx="3" sz="quarter"/>
+            <p:ph type="body" sz="quarter" idx="3"/>
           </p:nvPr>
         </p:nvSpPr>
         <p:spPr/>
@@ -1809,7 +1827,7 @@
             <a:spLocks noGrp="1"/>
           </p:cNvSpPr>
           <p:nvPr>
-            <p:ph type="sldNum" idx="5" sz="quarter"/>
+            <p:ph type="sldNum" sz="quarter" idx="5"/>
           </p:nvPr>
         </p:nvSpPr>
         <p:spPr/>
@@ -1823,7 +1841,7 @@
 </file>
 
 <file path=ppt/notesSlides/notesSlide6.xml><?xml version="1.0" encoding="utf-8"?>
-<p:notes xmlns:a="http://schemas.openxmlformats.org/drawingml/2006/main" xmlns:p="http://schemas.openxmlformats.org/presentationml/2006/main" xmlns:r="http://schemas.openxmlformats.org/officeDocument/2006/relationships">
+<p:notes xmlns:a="http://schemas.openxmlformats.org/drawingml/2006/main" xmlns:r="http://schemas.openxmlformats.org/officeDocument/2006/relationships" xmlns:p="http://schemas.openxmlformats.org/presentationml/2006/main">
   <p:cSld>
     <p:spTree>
       <p:nvGrpSpPr>
@@ -1843,7 +1861,7 @@
         <p:nvSpPr>
           <p:cNvPr id="2" name="Slide Image Placeholder 1"/>
           <p:cNvSpPr>
-            <a:spLocks noGrp="1"/>
+            <a:spLocks noGrp="1" noRot="1" noChangeAspect="1"/>
           </p:cNvSpPr>
           <p:nvPr>
             <p:ph type="sldImg" idx="2"/>
@@ -1858,7 +1876,7 @@
             <a:spLocks noGrp="1"/>
           </p:cNvSpPr>
           <p:nvPr>
-            <p:ph type="body" idx="3" sz="quarter"/>
+            <p:ph type="body" sz="quarter" idx="3"/>
           </p:nvPr>
         </p:nvSpPr>
         <p:spPr/>
@@ -1879,7 +1897,7 @@
             <a:spLocks noGrp="1"/>
           </p:cNvSpPr>
           <p:nvPr>
-            <p:ph type="sldNum" idx="5" sz="quarter"/>
+            <p:ph type="sldNum" sz="quarter" idx="5"/>
           </p:nvPr>
         </p:nvSpPr>
         <p:spPr/>
@@ -1893,7 +1911,7 @@
 </file>
 
 <file path=ppt/notesSlides/notesSlide7.xml><?xml version="1.0" encoding="utf-8"?>
-<p:notes xmlns:a="http://schemas.openxmlformats.org/drawingml/2006/main" xmlns:p="http://schemas.openxmlformats.org/presentationml/2006/main" xmlns:r="http://schemas.openxmlformats.org/officeDocument/2006/relationships">
+<p:notes xmlns:a="http://schemas.openxmlformats.org/drawingml/2006/main" xmlns:r="http://schemas.openxmlformats.org/officeDocument/2006/relationships" xmlns:p="http://schemas.openxmlformats.org/presentationml/2006/main">
   <p:cSld>
     <p:spTree>
       <p:nvGrpSpPr>
@@ -1913,7 +1931,7 @@
         <p:nvSpPr>
           <p:cNvPr id="2" name="Slide Image Placeholder 1"/>
           <p:cNvSpPr>
-            <a:spLocks noGrp="1"/>
+            <a:spLocks noGrp="1" noRot="1" noChangeAspect="1"/>
           </p:cNvSpPr>
           <p:nvPr>
             <p:ph type="sldImg" idx="2"/>
@@ -1928,7 +1946,7 @@
             <a:spLocks noGrp="1"/>
           </p:cNvSpPr>
           <p:nvPr>
-            <p:ph type="body" idx="3" sz="quarter"/>
+            <p:ph type="body" sz="quarter" idx="3"/>
           </p:nvPr>
         </p:nvSpPr>
         <p:spPr/>
@@ -1949,7 +1967,7 @@
             <a:spLocks noGrp="1"/>
           </p:cNvSpPr>
           <p:nvPr>
-            <p:ph type="sldNum" idx="5" sz="quarter"/>
+            <p:ph type="sldNum" sz="quarter" idx="5"/>
           </p:nvPr>
         </p:nvSpPr>
         <p:spPr/>
@@ -1963,7 +1981,7 @@
 </file>
 
 <file path=ppt/notesSlides/notesSlide8.xml><?xml version="1.0" encoding="utf-8"?>
-<p:notes xmlns:a="http://schemas.openxmlformats.org/drawingml/2006/main" xmlns:p="http://schemas.openxmlformats.org/presentationml/2006/main" xmlns:r="http://schemas.openxmlformats.org/officeDocument/2006/relationships">
+<p:notes xmlns:a="http://schemas.openxmlformats.org/drawingml/2006/main" xmlns:r="http://schemas.openxmlformats.org/officeDocument/2006/relationships" xmlns:p="http://schemas.openxmlformats.org/presentationml/2006/main">
   <p:cSld>
     <p:spTree>
       <p:nvGrpSpPr>
@@ -1983,7 +2001,7 @@
         <p:nvSpPr>
           <p:cNvPr id="2" name="Slide Image Placeholder 1"/>
           <p:cNvSpPr>
-            <a:spLocks noGrp="1"/>
+            <a:spLocks noGrp="1" noRot="1" noChangeAspect="1"/>
           </p:cNvSpPr>
           <p:nvPr>
             <p:ph type="sldImg" idx="2"/>
@@ -1998,7 +2016,7 @@
             <a:spLocks noGrp="1"/>
           </p:cNvSpPr>
           <p:nvPr>
-            <p:ph type="body" idx="3" sz="quarter"/>
+            <p:ph type="body" sz="quarter" idx="3"/>
           </p:nvPr>
         </p:nvSpPr>
         <p:spPr/>
@@ -2019,7 +2037,7 @@
             <a:spLocks noGrp="1"/>
           </p:cNvSpPr>
           <p:nvPr>
-            <p:ph type="sldNum" idx="5" sz="quarter"/>
+            <p:ph type="sldNum" sz="quarter" idx="5"/>
           </p:nvPr>
         </p:nvSpPr>
         <p:spPr/>
@@ -2033,7 +2051,7 @@
 </file>
 
 <file path=ppt/notesSlides/notesSlide9.xml><?xml version="1.0" encoding="utf-8"?>
-<p:notes xmlns:a="http://schemas.openxmlformats.org/drawingml/2006/main" xmlns:p="http://schemas.openxmlformats.org/presentationml/2006/main" xmlns:r="http://schemas.openxmlformats.org/officeDocument/2006/relationships">
+<p:notes xmlns:a="http://schemas.openxmlformats.org/drawingml/2006/main" xmlns:r="http://schemas.openxmlformats.org/officeDocument/2006/relationships" xmlns:p="http://schemas.openxmlformats.org/presentationml/2006/main">
   <p:cSld>
     <p:spTree>
       <p:nvGrpSpPr>
@@ -2053,7 +2071,7 @@
         <p:nvSpPr>
           <p:cNvPr id="2" name="Slide Image Placeholder 1"/>
           <p:cNvSpPr>
-            <a:spLocks noGrp="1"/>
+            <a:spLocks noGrp="1" noRot="1" noChangeAspect="1"/>
           </p:cNvSpPr>
           <p:nvPr>
             <p:ph type="sldImg" idx="2"/>
@@ -2068,7 +2086,7 @@
             <a:spLocks noGrp="1"/>
           </p:cNvSpPr>
           <p:nvPr>
-            <p:ph type="body" idx="3" sz="quarter"/>
+            <p:ph type="body" sz="quarter" idx="3"/>
           </p:nvPr>
         </p:nvSpPr>
         <p:spPr/>
@@ -2089,7 +2107,7 @@
             <a:spLocks noGrp="1"/>
           </p:cNvSpPr>
           <p:nvPr>
-            <p:ph type="sldNum" idx="5" sz="quarter"/>
+            <p:ph type="sldNum" sz="quarter" idx="5"/>
           </p:nvPr>
         </p:nvSpPr>
         <p:spPr/>
@@ -2140,10 +2158,9 @@
           <a:lstStyle/>
           <a:p>
             <a:r>
-              <a:rPr lang="en-US" smtClean="0"/>
+              <a:rPr lang="en-US"/>
               <a:t>Click to edit Master title style</a:t>
             </a:r>
-            <a:endParaRPr lang="en-US"/>
           </a:p>
         </p:txBody>
       </p:sp>
@@ -2259,10 +2276,9 @@
           </a:lstStyle>
           <a:p>
             <a:r>
-              <a:rPr lang="en-US" smtClean="0"/>
+              <a:rPr lang="en-US"/>
               <a:t>Click to edit Master subtitle style</a:t>
             </a:r>
-            <a:endParaRPr lang="en-US"/>
           </a:p>
         </p:txBody>
       </p:sp>
@@ -2283,7 +2299,7 @@
           <a:p>
             <a:fld id="{5BCAD085-E8A6-8845-BD4E-CB4CCA059FC4}" type="datetimeFigureOut">
               <a:rPr lang="en-US" smtClean="0"/>
-              <a:t>1/27/13</a:t>
+              <a:t>10/29/2026</a:t>
             </a:fld>
             <a:endParaRPr lang="en-US"/>
           </a:p>
@@ -2377,10 +2393,9 @@
           <a:lstStyle/>
           <a:p>
             <a:r>
-              <a:rPr lang="en-US" smtClean="0"/>
+              <a:rPr lang="en-US"/>
               <a:t>Click to edit Master title style</a:t>
             </a:r>
-            <a:endParaRPr lang="en-US"/>
           </a:p>
         </p:txBody>
       </p:sp>
@@ -2401,38 +2416,37 @@
           <a:p>
             <a:pPr lvl="0"/>
             <a:r>
-              <a:rPr lang="en-US" smtClean="0"/>
+              <a:rPr lang="en-US"/>
               <a:t>Click to edit Master text styles</a:t>
             </a:r>
           </a:p>
           <a:p>
             <a:pPr lvl="1"/>
             <a:r>
-              <a:rPr lang="en-US" smtClean="0"/>
+              <a:rPr lang="en-US"/>
               <a:t>Second level</a:t>
             </a:r>
           </a:p>
           <a:p>
             <a:pPr lvl="2"/>
             <a:r>
-              <a:rPr lang="en-US" smtClean="0"/>
+              <a:rPr lang="en-US"/>
               <a:t>Third level</a:t>
             </a:r>
           </a:p>
           <a:p>
             <a:pPr lvl="3"/>
             <a:r>
-              <a:rPr lang="en-US" smtClean="0"/>
+              <a:rPr lang="en-US"/>
               <a:t>Fourth level</a:t>
             </a:r>
           </a:p>
           <a:p>
             <a:pPr lvl="4"/>
             <a:r>
-              <a:rPr lang="en-US" smtClean="0"/>
+              <a:rPr lang="en-US"/>
               <a:t>Fifth level</a:t>
             </a:r>
-            <a:endParaRPr lang="en-US"/>
           </a:p>
         </p:txBody>
       </p:sp>
@@ -2453,7 +2467,7 @@
           <a:p>
             <a:fld id="{5BCAD085-E8A6-8845-BD4E-CB4CCA059FC4}" type="datetimeFigureOut">
               <a:rPr lang="en-US" smtClean="0"/>
-              <a:t>1/27/13</a:t>
+              <a:t>10/29/2026</a:t>
             </a:fld>
             <a:endParaRPr lang="en-US"/>
           </a:p>
@@ -2552,10 +2566,9 @@
           <a:lstStyle/>
           <a:p>
             <a:r>
-              <a:rPr lang="en-US" smtClean="0"/>
+              <a:rPr lang="en-US"/>
               <a:t>Click to edit Master title style</a:t>
             </a:r>
-            <a:endParaRPr lang="en-US"/>
           </a:p>
         </p:txBody>
       </p:sp>
@@ -2581,38 +2594,37 @@
           <a:p>
             <a:pPr lvl="0"/>
             <a:r>
-              <a:rPr lang="en-US" smtClean="0"/>
+              <a:rPr lang="en-US"/>
               <a:t>Click to edit Master text styles</a:t>
             </a:r>
           </a:p>
           <a:p>
             <a:pPr lvl="1"/>
             <a:r>
-              <a:rPr lang="en-US" smtClean="0"/>
+              <a:rPr lang="en-US"/>
               <a:t>Second level</a:t>
             </a:r>
           </a:p>
           <a:p>
             <a:pPr lvl="2"/>
             <a:r>
-              <a:rPr lang="en-US" smtClean="0"/>
+              <a:rPr lang="en-US"/>
               <a:t>Third level</a:t>
             </a:r>
           </a:p>
           <a:p>
             <a:pPr lvl="3"/>
             <a:r>
-              <a:rPr lang="en-US" smtClean="0"/>
+              <a:rPr lang="en-US"/>
               <a:t>Fourth level</a:t>
             </a:r>
           </a:p>
           <a:p>
             <a:pPr lvl="4"/>
             <a:r>
-              <a:rPr lang="en-US" smtClean="0"/>
+              <a:rPr lang="en-US"/>
               <a:t>Fifth level</a:t>
             </a:r>
-            <a:endParaRPr lang="en-US"/>
           </a:p>
         </p:txBody>
       </p:sp>
@@ -2633,7 +2645,7 @@
           <a:p>
             <a:fld id="{5BCAD085-E8A6-8845-BD4E-CB4CCA059FC4}" type="datetimeFigureOut">
               <a:rPr lang="en-US" smtClean="0"/>
-              <a:t>1/27/13</a:t>
+              <a:t>10/29/2026</a:t>
             </a:fld>
             <a:endParaRPr lang="en-US"/>
           </a:p>
@@ -2727,10 +2739,9 @@
           <a:lstStyle/>
           <a:p>
             <a:r>
-              <a:rPr lang="en-US" smtClean="0"/>
+              <a:rPr lang="en-US"/>
               <a:t>Click to edit Master title style</a:t>
             </a:r>
-            <a:endParaRPr lang="en-US"/>
           </a:p>
         </p:txBody>
       </p:sp>
@@ -2751,38 +2762,37 @@
           <a:p>
             <a:pPr lvl="0"/>
             <a:r>
-              <a:rPr lang="en-US" smtClean="0"/>
+              <a:rPr lang="en-US"/>
               <a:t>Click to edit Master text styles</a:t>
             </a:r>
           </a:p>
           <a:p>
             <a:pPr lvl="1"/>
             <a:r>
-              <a:rPr lang="en-US" smtClean="0"/>
+              <a:rPr lang="en-US"/>
               <a:t>Second level</a:t>
             </a:r>
           </a:p>
           <a:p>
             <a:pPr lvl="2"/>
             <a:r>
-              <a:rPr lang="en-US" smtClean="0"/>
+              <a:rPr lang="en-US"/>
               <a:t>Third level</a:t>
             </a:r>
           </a:p>
           <a:p>
             <a:pPr lvl="3"/>
             <a:r>
-              <a:rPr lang="en-US" smtClean="0"/>
+              <a:rPr lang="en-US"/>
               <a:t>Fourth level</a:t>
             </a:r>
           </a:p>
           <a:p>
             <a:pPr lvl="4"/>
             <a:r>
-              <a:rPr lang="en-US" smtClean="0"/>
+              <a:rPr lang="en-US"/>
               <a:t>Fifth level</a:t>
             </a:r>
-            <a:endParaRPr lang="en-US"/>
           </a:p>
         </p:txBody>
       </p:sp>
@@ -2803,7 +2813,7 @@
           <a:p>
             <a:fld id="{5BCAD085-E8A6-8845-BD4E-CB4CCA059FC4}" type="datetimeFigureOut">
               <a:rPr lang="en-US" smtClean="0"/>
-              <a:t>1/27/13</a:t>
+              <a:t>10/29/2026</a:t>
             </a:fld>
             <a:endParaRPr lang="en-US"/>
           </a:p>
@@ -2906,10 +2916,9 @@
           </a:lstStyle>
           <a:p>
             <a:r>
-              <a:rPr lang="en-US" smtClean="0"/>
+              <a:rPr lang="en-US"/>
               <a:t>Click to edit Master title style</a:t>
             </a:r>
-            <a:endParaRPr lang="en-US"/>
           </a:p>
         </p:txBody>
       </p:sp>
@@ -3026,7 +3035,7 @@
           <a:p>
             <a:pPr lvl="0"/>
             <a:r>
-              <a:rPr lang="en-US" smtClean="0"/>
+              <a:rPr lang="en-US"/>
               <a:t>Click to edit Master text styles</a:t>
             </a:r>
           </a:p>
@@ -3049,7 +3058,7 @@
           <a:p>
             <a:fld id="{5BCAD085-E8A6-8845-BD4E-CB4CCA059FC4}" type="datetimeFigureOut">
               <a:rPr lang="en-US" smtClean="0"/>
-              <a:t>1/27/13</a:t>
+              <a:t>10/29/2026</a:t>
             </a:fld>
             <a:endParaRPr lang="en-US"/>
           </a:p>
@@ -3143,10 +3152,9 @@
           <a:lstStyle/>
           <a:p>
             <a:r>
-              <a:rPr lang="en-US" smtClean="0"/>
+              <a:rPr lang="en-US"/>
               <a:t>Click to edit Master title style</a:t>
             </a:r>
-            <a:endParaRPr lang="en-US"/>
           </a:p>
         </p:txBody>
       </p:sp>
@@ -3200,38 +3208,37 @@
           <a:p>
             <a:pPr lvl="0"/>
             <a:r>
-              <a:rPr lang="en-US" smtClean="0"/>
+              <a:rPr lang="en-US"/>
               <a:t>Click to edit Master text styles</a:t>
             </a:r>
           </a:p>
           <a:p>
             <a:pPr lvl="1"/>
             <a:r>
-              <a:rPr lang="en-US" smtClean="0"/>
+              <a:rPr lang="en-US"/>
               <a:t>Second level</a:t>
             </a:r>
           </a:p>
           <a:p>
             <a:pPr lvl="2"/>
             <a:r>
-              <a:rPr lang="en-US" smtClean="0"/>
+              <a:rPr lang="en-US"/>
               <a:t>Third level</a:t>
             </a:r>
           </a:p>
           <a:p>
             <a:pPr lvl="3"/>
             <a:r>
-              <a:rPr lang="en-US" smtClean="0"/>
+              <a:rPr lang="en-US"/>
               <a:t>Fourth level</a:t>
             </a:r>
           </a:p>
           <a:p>
             <a:pPr lvl="4"/>
             <a:r>
-              <a:rPr lang="en-US" smtClean="0"/>
+              <a:rPr lang="en-US"/>
               <a:t>Fifth level</a:t>
             </a:r>
-            <a:endParaRPr lang="en-US"/>
           </a:p>
         </p:txBody>
       </p:sp>
@@ -3285,38 +3292,37 @@
           <a:p>
             <a:pPr lvl="0"/>
             <a:r>
-              <a:rPr lang="en-US" smtClean="0"/>
+              <a:rPr lang="en-US"/>
               <a:t>Click to edit Master text styles</a:t>
             </a:r>
           </a:p>
           <a:p>
             <a:pPr lvl="1"/>
             <a:r>
-              <a:rPr lang="en-US" smtClean="0"/>
+              <a:rPr lang="en-US"/>
               <a:t>Second level</a:t>
             </a:r>
           </a:p>
           <a:p>
             <a:pPr lvl="2"/>
             <a:r>
-              <a:rPr lang="en-US" smtClean="0"/>
+              <a:rPr lang="en-US"/>
               <a:t>Third level</a:t>
             </a:r>
           </a:p>
           <a:p>
             <a:pPr lvl="3"/>
             <a:r>
-              <a:rPr lang="en-US" smtClean="0"/>
+              <a:rPr lang="en-US"/>
               <a:t>Fourth level</a:t>
             </a:r>
           </a:p>
           <a:p>
             <a:pPr lvl="4"/>
             <a:r>
-              <a:rPr lang="en-US" smtClean="0"/>
+              <a:rPr lang="en-US"/>
               <a:t>Fifth level</a:t>
             </a:r>
-            <a:endParaRPr lang="en-US"/>
           </a:p>
         </p:txBody>
       </p:sp>
@@ -3337,7 +3343,7 @@
           <a:p>
             <a:fld id="{5BCAD085-E8A6-8845-BD4E-CB4CCA059FC4}" type="datetimeFigureOut">
               <a:rPr lang="en-US" smtClean="0"/>
-              <a:t>1/27/13</a:t>
+              <a:t>10/29/2026</a:t>
             </a:fld>
             <a:endParaRPr lang="en-US"/>
           </a:p>
@@ -3435,10 +3441,9 @@
           </a:lstStyle>
           <a:p>
             <a:r>
-              <a:rPr lang="en-US" smtClean="0"/>
+              <a:rPr lang="en-US"/>
               <a:t>Click to edit Master title style</a:t>
             </a:r>
-            <a:endParaRPr lang="en-US"/>
           </a:p>
         </p:txBody>
       </p:sp>
@@ -3501,7 +3506,7 @@
           <a:p>
             <a:pPr lvl="0"/>
             <a:r>
-              <a:rPr lang="en-US" smtClean="0"/>
+              <a:rPr lang="en-US"/>
               <a:t>Click to edit Master text styles</a:t>
             </a:r>
           </a:p>
@@ -3557,38 +3562,37 @@
           <a:p>
             <a:pPr lvl="0"/>
             <a:r>
-              <a:rPr lang="en-US" smtClean="0"/>
+              <a:rPr lang="en-US"/>
               <a:t>Click to edit Master text styles</a:t>
             </a:r>
           </a:p>
           <a:p>
             <a:pPr lvl="1"/>
             <a:r>
-              <a:rPr lang="en-US" smtClean="0"/>
+              <a:rPr lang="en-US"/>
               <a:t>Second level</a:t>
             </a:r>
           </a:p>
           <a:p>
             <a:pPr lvl="2"/>
             <a:r>
-              <a:rPr lang="en-US" smtClean="0"/>
+              <a:rPr lang="en-US"/>
               <a:t>Third level</a:t>
             </a:r>
           </a:p>
           <a:p>
             <a:pPr lvl="3"/>
             <a:r>
-              <a:rPr lang="en-US" smtClean="0"/>
+              <a:rPr lang="en-US"/>
               <a:t>Fourth level</a:t>
             </a:r>
           </a:p>
           <a:p>
             <a:pPr lvl="4"/>
             <a:r>
-              <a:rPr lang="en-US" smtClean="0"/>
+              <a:rPr lang="en-US"/>
               <a:t>Fifth level</a:t>
             </a:r>
-            <a:endParaRPr lang="en-US"/>
           </a:p>
         </p:txBody>
       </p:sp>
@@ -3651,7 +3655,7 @@
           <a:p>
             <a:pPr lvl="0"/>
             <a:r>
-              <a:rPr lang="en-US" smtClean="0"/>
+              <a:rPr lang="en-US"/>
               <a:t>Click to edit Master text styles</a:t>
             </a:r>
           </a:p>
@@ -3707,38 +3711,37 @@
           <a:p>
             <a:pPr lvl="0"/>
             <a:r>
-              <a:rPr lang="en-US" smtClean="0"/>
+              <a:rPr lang="en-US"/>
               <a:t>Click to edit Master text styles</a:t>
             </a:r>
           </a:p>
           <a:p>
             <a:pPr lvl="1"/>
             <a:r>
-              <a:rPr lang="en-US" smtClean="0"/>
+              <a:rPr lang="en-US"/>
               <a:t>Second level</a:t>
             </a:r>
           </a:p>
           <a:p>
             <a:pPr lvl="2"/>
             <a:r>
-              <a:rPr lang="en-US" smtClean="0"/>
+              <a:rPr lang="en-US"/>
               <a:t>Third level</a:t>
             </a:r>
           </a:p>
           <a:p>
             <a:pPr lvl="3"/>
             <a:r>
-              <a:rPr lang="en-US" smtClean="0"/>
+              <a:rPr lang="en-US"/>
               <a:t>Fourth level</a:t>
             </a:r>
           </a:p>
           <a:p>
             <a:pPr lvl="4"/>
             <a:r>
-              <a:rPr lang="en-US" smtClean="0"/>
+              <a:rPr lang="en-US"/>
               <a:t>Fifth level</a:t>
             </a:r>
-            <a:endParaRPr lang="en-US"/>
           </a:p>
         </p:txBody>
       </p:sp>
@@ -3759,7 +3762,7 @@
           <a:p>
             <a:fld id="{5BCAD085-E8A6-8845-BD4E-CB4CCA059FC4}" type="datetimeFigureOut">
               <a:rPr lang="en-US" smtClean="0"/>
-              <a:t>1/27/13</a:t>
+              <a:t>10/29/2026</a:t>
             </a:fld>
             <a:endParaRPr lang="en-US"/>
           </a:p>
@@ -3853,10 +3856,9 @@
           <a:lstStyle/>
           <a:p>
             <a:r>
-              <a:rPr lang="en-US" smtClean="0"/>
+              <a:rPr lang="en-US"/>
               <a:t>Click to edit Master title style</a:t>
             </a:r>
-            <a:endParaRPr lang="en-US"/>
           </a:p>
         </p:txBody>
       </p:sp>
@@ -3877,7 +3879,7 @@
           <a:p>
             <a:fld id="{5BCAD085-E8A6-8845-BD4E-CB4CCA059FC4}" type="datetimeFigureOut">
               <a:rPr lang="en-US" smtClean="0"/>
-              <a:t>1/27/13</a:t>
+              <a:t>10/29/2026</a:t>
             </a:fld>
             <a:endParaRPr lang="en-US"/>
           </a:p>
@@ -3972,7 +3974,7 @@
           <a:p>
             <a:fld id="{5BCAD085-E8A6-8845-BD4E-CB4CCA059FC4}" type="datetimeFigureOut">
               <a:rPr lang="en-US" smtClean="0"/>
-              <a:t>1/27/13</a:t>
+              <a:t>10/29/2026</a:t>
             </a:fld>
             <a:endParaRPr lang="en-US"/>
           </a:p>
@@ -4075,10 +4077,9 @@
           </a:lstStyle>
           <a:p>
             <a:r>
-              <a:rPr lang="en-US" smtClean="0"/>
+              <a:rPr lang="en-US"/>
               <a:t>Click to edit Master title style</a:t>
             </a:r>
-            <a:endParaRPr lang="en-US"/>
           </a:p>
         </p:txBody>
       </p:sp>
@@ -4132,38 +4133,37 @@
           <a:p>
             <a:pPr lvl="0"/>
             <a:r>
-              <a:rPr lang="en-US" smtClean="0"/>
+              <a:rPr lang="en-US"/>
               <a:t>Click to edit Master text styles</a:t>
             </a:r>
           </a:p>
           <a:p>
             <a:pPr lvl="1"/>
             <a:r>
-              <a:rPr lang="en-US" smtClean="0"/>
+              <a:rPr lang="en-US"/>
               <a:t>Second level</a:t>
             </a:r>
           </a:p>
           <a:p>
             <a:pPr lvl="2"/>
             <a:r>
-              <a:rPr lang="en-US" smtClean="0"/>
+              <a:rPr lang="en-US"/>
               <a:t>Third level</a:t>
             </a:r>
           </a:p>
           <a:p>
             <a:pPr lvl="3"/>
             <a:r>
-              <a:rPr lang="en-US" smtClean="0"/>
+              <a:rPr lang="en-US"/>
               <a:t>Fourth level</a:t>
             </a:r>
           </a:p>
           <a:p>
             <a:pPr lvl="4"/>
             <a:r>
-              <a:rPr lang="en-US" smtClean="0"/>
+              <a:rPr lang="en-US"/>
               <a:t>Fifth level</a:t>
             </a:r>
-            <a:endParaRPr lang="en-US"/>
           </a:p>
         </p:txBody>
       </p:sp>
@@ -4226,7 +4226,7 @@
           <a:p>
             <a:pPr lvl="0"/>
             <a:r>
-              <a:rPr lang="en-US" smtClean="0"/>
+              <a:rPr lang="en-US"/>
               <a:t>Click to edit Master text styles</a:t>
             </a:r>
           </a:p>
@@ -4249,7 +4249,7 @@
           <a:p>
             <a:fld id="{5BCAD085-E8A6-8845-BD4E-CB4CCA059FC4}" type="datetimeFigureOut">
               <a:rPr lang="en-US" smtClean="0"/>
-              <a:t>1/27/13</a:t>
+              <a:t>10/29/2026</a:t>
             </a:fld>
             <a:endParaRPr lang="en-US"/>
           </a:p>
@@ -4352,10 +4352,9 @@
           </a:lstStyle>
           <a:p>
             <a:r>
-              <a:rPr lang="en-US" smtClean="0"/>
+              <a:rPr lang="en-US"/>
               <a:t>Click to edit Master title style</a:t>
             </a:r>
-            <a:endParaRPr lang="en-US"/>
           </a:p>
         </p:txBody>
       </p:sp>
@@ -4479,7 +4478,7 @@
           <a:p>
             <a:pPr lvl="0"/>
             <a:r>
-              <a:rPr lang="en-US" smtClean="0"/>
+              <a:rPr lang="en-US"/>
               <a:t>Click to edit Master text styles</a:t>
             </a:r>
           </a:p>
@@ -4502,7 +4501,7 @@
           <a:p>
             <a:fld id="{5BCAD085-E8A6-8845-BD4E-CB4CCA059FC4}" type="datetimeFigureOut">
               <a:rPr lang="en-US" smtClean="0"/>
-              <a:t>1/27/13</a:t>
+              <a:t>10/29/2026</a:t>
             </a:fld>
             <a:endParaRPr lang="en-US"/>
           </a:p>
@@ -4611,10 +4610,9 @@
           <a:lstStyle/>
           <a:p>
             <a:r>
-              <a:rPr lang="en-US" smtClean="0"/>
+              <a:rPr lang="en-US"/>
               <a:t>Click to edit Master title style</a:t>
             </a:r>
-            <a:endParaRPr lang="en-US"/>
           </a:p>
         </p:txBody>
       </p:sp>
@@ -4645,38 +4643,37 @@
           <a:p>
             <a:pPr lvl="0"/>
             <a:r>
-              <a:rPr lang="en-US" smtClean="0"/>
+              <a:rPr lang="en-US"/>
               <a:t>Click to edit Master text styles</a:t>
             </a:r>
           </a:p>
           <a:p>
             <a:pPr lvl="1"/>
             <a:r>
-              <a:rPr lang="en-US" smtClean="0"/>
+              <a:rPr lang="en-US"/>
               <a:t>Second level</a:t>
             </a:r>
           </a:p>
           <a:p>
             <a:pPr lvl="2"/>
             <a:r>
-              <a:rPr lang="en-US" smtClean="0"/>
+              <a:rPr lang="en-US"/>
               <a:t>Third level</a:t>
             </a:r>
           </a:p>
           <a:p>
             <a:pPr lvl="3"/>
             <a:r>
-              <a:rPr lang="en-US" smtClean="0"/>
+              <a:rPr lang="en-US"/>
               <a:t>Fourth level</a:t>
             </a:r>
           </a:p>
           <a:p>
             <a:pPr lvl="4"/>
             <a:r>
-              <a:rPr lang="en-US" smtClean="0"/>
+              <a:rPr lang="en-US"/>
               <a:t>Fifth level</a:t>
             </a:r>
-            <a:endParaRPr lang="en-US"/>
           </a:p>
         </p:txBody>
       </p:sp>
@@ -4715,7 +4712,7 @@
           <a:p>
             <a:fld id="{5BCAD085-E8A6-8845-BD4E-CB4CCA059FC4}" type="datetimeFigureOut">
               <a:rPr lang="en-US" smtClean="0"/>
-              <a:t>1/27/13</a:t>
+              <a:t>10/29/2026</a:t>
             </a:fld>
             <a:endParaRPr lang="en-US"/>
           </a:p>
@@ -5074,7 +5071,7 @@
 </file>
 
 <file path=ppt/slides/slide1.xml><?xml version="1.0" encoding="utf-8"?>
-<p:sld xmlns:a="http://schemas.openxmlformats.org/drawingml/2006/main" xmlns:p="http://schemas.openxmlformats.org/presentationml/2006/main" xmlns:r="http://schemas.openxmlformats.org/officeDocument/2006/relationships">
+<p:sld xmlns:a="http://schemas.openxmlformats.org/drawingml/2006/main" xmlns:r="http://schemas.openxmlformats.org/officeDocument/2006/relationships" xmlns:p="http://schemas.openxmlformats.org/presentationml/2006/main">
   <p:cSld>
     <p:spTree>
       <p:nvGrpSpPr>
@@ -5082,7 +5079,14 @@
         <p:cNvGrpSpPr/>
         <p:nvPr/>
       </p:nvGrpSpPr>
-      <p:grpSpPr/>
+      <p:grpSpPr>
+        <a:xfrm>
+          <a:off x="0" y="0"/>
+          <a:ext cx="0" cy="0"/>
+          <a:chOff x="0" y="0"/>
+          <a:chExt cx="0" cy="0"/>
+        </a:xfrm>
+      </p:grpSpPr>
       <p:sp>
         <p:nvSpPr>
           <p:cNvPr id="2" name="Rectangle 1"/>
@@ -5124,6 +5128,7 @@
           <a:lstStyle/>
           <a:p>
             <a:pPr algn="ctr"/>
+            <a:endParaRPr/>
           </a:p>
         </p:txBody>
       </p:sp>
@@ -5168,6 +5173,7 @@
           <a:lstStyle/>
           <a:p>
             <a:pPr algn="ctr"/>
+            <a:endParaRPr/>
           </a:p>
         </p:txBody>
       </p:sp>
@@ -5212,6 +5218,7 @@
           <a:lstStyle/>
           <a:p>
             <a:pPr algn="ctr"/>
+            <a:endParaRPr/>
           </a:p>
         </p:txBody>
       </p:sp>
@@ -5263,7 +5270,7 @@
         <p:spPr>
           <a:xfrm>
             <a:off x="731520" y="2377440"/>
-            <a:ext cx="10698480" cy="1554480"/>
+            <a:ext cx="10698480" cy="615553"/>
           </a:xfrm>
           <a:prstGeom prst="rect">
             <a:avLst/>
@@ -5282,14 +5289,29 @@
               </a:spcAft>
             </a:pPr>
             <a:r>
-              <a:rPr sz="3400" b="1">
+              <a:rPr sz="3400" b="1" dirty="0">
                 <a:solidFill>
                   <a:srgbClr val="C0392B"/>
                 </a:solidFill>
                 <a:latin typeface="맑은 고딕"/>
               </a:rPr>
-              <a:t>ASM 리밸런스와</a:t>
-            </a:r>
+              <a:t>ASM </a:t>
+            </a:r>
+            <a:r>
+              <a:rPr sz="3400" b="1" dirty="0" err="1">
+                <a:solidFill>
+                  <a:srgbClr val="C0392B"/>
+                </a:solidFill>
+                <a:latin typeface="맑은 고딕"/>
+              </a:rPr>
+              <a:t>리밸런스</a:t>
+            </a:r>
+            <a:endParaRPr sz="3400" b="1" dirty="0">
+              <a:solidFill>
+                <a:srgbClr val="C0392B"/>
+              </a:solidFill>
+              <a:latin typeface="맑은 고딕"/>
+            </a:endParaRPr>
           </a:p>
         </p:txBody>
       </p:sp>
@@ -5380,7 +5402,7 @@
 </file>
 
 <file path=ppt/slides/slide10.xml><?xml version="1.0" encoding="utf-8"?>
-<p:sld xmlns:a="http://schemas.openxmlformats.org/drawingml/2006/main" xmlns:p="http://schemas.openxmlformats.org/presentationml/2006/main" xmlns:r="http://schemas.openxmlformats.org/officeDocument/2006/relationships">
+<p:sld xmlns:a="http://schemas.openxmlformats.org/drawingml/2006/main" xmlns:r="http://schemas.openxmlformats.org/officeDocument/2006/relationships" xmlns:p="http://schemas.openxmlformats.org/presentationml/2006/main">
   <p:cSld>
     <p:spTree>
       <p:nvGrpSpPr>
@@ -5388,7 +5410,14 @@
         <p:cNvGrpSpPr/>
         <p:nvPr/>
       </p:nvGrpSpPr>
-      <p:grpSpPr/>
+      <p:grpSpPr>
+        <a:xfrm>
+          <a:off x="0" y="0"/>
+          <a:ext cx="0" cy="0"/>
+          <a:chOff x="0" y="0"/>
+          <a:chExt cx="0" cy="0"/>
+        </a:xfrm>
+      </p:grpSpPr>
       <p:sp>
         <p:nvSpPr>
           <p:cNvPr id="2" name="Rectangle 1"/>
@@ -5430,6 +5459,7 @@
           <a:lstStyle/>
           <a:p>
             <a:pPr algn="ctr"/>
+            <a:endParaRPr/>
           </a:p>
         </p:txBody>
       </p:sp>
@@ -5623,7 +5653,7 @@
 </file>
 
 <file path=ppt/slides/slide11.xml><?xml version="1.0" encoding="utf-8"?>
-<p:sld xmlns:a="http://schemas.openxmlformats.org/drawingml/2006/main" xmlns:p="http://schemas.openxmlformats.org/presentationml/2006/main" xmlns:r="http://schemas.openxmlformats.org/officeDocument/2006/relationships">
+<p:sld xmlns:a="http://schemas.openxmlformats.org/drawingml/2006/main" xmlns:r="http://schemas.openxmlformats.org/officeDocument/2006/relationships" xmlns:p="http://schemas.openxmlformats.org/presentationml/2006/main">
   <p:cSld>
     <p:spTree>
       <p:nvGrpSpPr>
@@ -5631,7 +5661,14 @@
         <p:cNvGrpSpPr/>
         <p:nvPr/>
       </p:nvGrpSpPr>
-      <p:grpSpPr/>
+      <p:grpSpPr>
+        <a:xfrm>
+          <a:off x="0" y="0"/>
+          <a:ext cx="0" cy="0"/>
+          <a:chOff x="0" y="0"/>
+          <a:chExt cx="0" cy="0"/>
+        </a:xfrm>
+      </p:grpSpPr>
       <p:sp>
         <p:nvSpPr>
           <p:cNvPr id="2" name="Rectangle 1"/>
@@ -5673,6 +5710,7 @@
           <a:lstStyle/>
           <a:p>
             <a:pPr algn="ctr"/>
+            <a:endParaRPr/>
           </a:p>
         </p:txBody>
       </p:sp>
@@ -5866,7 +5904,7 @@
 </file>
 
 <file path=ppt/slides/slide12.xml><?xml version="1.0" encoding="utf-8"?>
-<p:sld xmlns:a="http://schemas.openxmlformats.org/drawingml/2006/main" xmlns:p="http://schemas.openxmlformats.org/presentationml/2006/main" xmlns:r="http://schemas.openxmlformats.org/officeDocument/2006/relationships">
+<p:sld xmlns:a="http://schemas.openxmlformats.org/drawingml/2006/main" xmlns:r="http://schemas.openxmlformats.org/officeDocument/2006/relationships" xmlns:p="http://schemas.openxmlformats.org/presentationml/2006/main">
   <p:cSld>
     <p:spTree>
       <p:nvGrpSpPr>
@@ -5874,7 +5912,14 @@
         <p:cNvGrpSpPr/>
         <p:nvPr/>
       </p:nvGrpSpPr>
-      <p:grpSpPr/>
+      <p:grpSpPr>
+        <a:xfrm>
+          <a:off x="0" y="0"/>
+          <a:ext cx="0" cy="0"/>
+          <a:chOff x="0" y="0"/>
+          <a:chExt cx="0" cy="0"/>
+        </a:xfrm>
+      </p:grpSpPr>
       <p:sp>
         <p:nvSpPr>
           <p:cNvPr id="2" name="Rectangle 1"/>
@@ -5916,6 +5961,7 @@
           <a:lstStyle/>
           <a:p>
             <a:pPr algn="ctr"/>
+            <a:endParaRPr/>
           </a:p>
         </p:txBody>
       </p:sp>
@@ -6109,7 +6155,7 @@
 </file>
 
 <file path=ppt/slides/slide13.xml><?xml version="1.0" encoding="utf-8"?>
-<p:sld xmlns:a="http://schemas.openxmlformats.org/drawingml/2006/main" xmlns:p="http://schemas.openxmlformats.org/presentationml/2006/main" xmlns:r="http://schemas.openxmlformats.org/officeDocument/2006/relationships">
+<p:sld xmlns:a="http://schemas.openxmlformats.org/drawingml/2006/main" xmlns:r="http://schemas.openxmlformats.org/officeDocument/2006/relationships" xmlns:p="http://schemas.openxmlformats.org/presentationml/2006/main">
   <p:cSld>
     <p:spTree>
       <p:nvGrpSpPr>
@@ -6117,7 +6163,14 @@
         <p:cNvGrpSpPr/>
         <p:nvPr/>
       </p:nvGrpSpPr>
-      <p:grpSpPr/>
+      <p:grpSpPr>
+        <a:xfrm>
+          <a:off x="0" y="0"/>
+          <a:ext cx="0" cy="0"/>
+          <a:chOff x="0" y="0"/>
+          <a:chExt cx="0" cy="0"/>
+        </a:xfrm>
+      </p:grpSpPr>
       <p:sp>
         <p:nvSpPr>
           <p:cNvPr id="2" name="Rectangle 1"/>
@@ -6159,6 +6212,7 @@
           <a:lstStyle/>
           <a:p>
             <a:pPr algn="ctr"/>
+            <a:endParaRPr/>
           </a:p>
         </p:txBody>
       </p:sp>
@@ -6352,7 +6406,7 @@
 </file>
 
 <file path=ppt/slides/slide14.xml><?xml version="1.0" encoding="utf-8"?>
-<p:sld xmlns:a="http://schemas.openxmlformats.org/drawingml/2006/main" xmlns:p="http://schemas.openxmlformats.org/presentationml/2006/main" xmlns:r="http://schemas.openxmlformats.org/officeDocument/2006/relationships">
+<p:sld xmlns:a="http://schemas.openxmlformats.org/drawingml/2006/main" xmlns:r="http://schemas.openxmlformats.org/officeDocument/2006/relationships" xmlns:p="http://schemas.openxmlformats.org/presentationml/2006/main">
   <p:cSld>
     <p:spTree>
       <p:nvGrpSpPr>
@@ -6360,7 +6414,14 @@
         <p:cNvGrpSpPr/>
         <p:nvPr/>
       </p:nvGrpSpPr>
-      <p:grpSpPr/>
+      <p:grpSpPr>
+        <a:xfrm>
+          <a:off x="0" y="0"/>
+          <a:ext cx="0" cy="0"/>
+          <a:chOff x="0" y="0"/>
+          <a:chExt cx="0" cy="0"/>
+        </a:xfrm>
+      </p:grpSpPr>
       <p:sp>
         <p:nvSpPr>
           <p:cNvPr id="2" name="Rectangle 1"/>
@@ -6402,6 +6463,7 @@
           <a:lstStyle/>
           <a:p>
             <a:pPr algn="ctr"/>
+            <a:endParaRPr/>
           </a:p>
         </p:txBody>
       </p:sp>
@@ -6524,6 +6586,7 @@
           <a:lstStyle/>
           <a:p>
             <a:pPr algn="ctr"/>
+            <a:endParaRPr/>
           </a:p>
         </p:txBody>
       </p:sp>
@@ -6591,7 +6654,7 @@
 </file>
 
 <file path=ppt/slides/slide15.xml><?xml version="1.0" encoding="utf-8"?>
-<p:sld xmlns:a="http://schemas.openxmlformats.org/drawingml/2006/main" xmlns:p="http://schemas.openxmlformats.org/presentationml/2006/main" xmlns:r="http://schemas.openxmlformats.org/officeDocument/2006/relationships">
+<p:sld xmlns:a="http://schemas.openxmlformats.org/drawingml/2006/main" xmlns:r="http://schemas.openxmlformats.org/officeDocument/2006/relationships" xmlns:p="http://schemas.openxmlformats.org/presentationml/2006/main">
   <p:cSld>
     <p:spTree>
       <p:nvGrpSpPr>
@@ -6599,7 +6662,14 @@
         <p:cNvGrpSpPr/>
         <p:nvPr/>
       </p:nvGrpSpPr>
-      <p:grpSpPr/>
+      <p:grpSpPr>
+        <a:xfrm>
+          <a:off x="0" y="0"/>
+          <a:ext cx="0" cy="0"/>
+          <a:chOff x="0" y="0"/>
+          <a:chExt cx="0" cy="0"/>
+        </a:xfrm>
+      </p:grpSpPr>
       <p:sp>
         <p:nvSpPr>
           <p:cNvPr id="2" name="Rectangle 1"/>
@@ -6641,6 +6711,7 @@
           <a:lstStyle/>
           <a:p>
             <a:pPr algn="ctr"/>
+            <a:endParaRPr/>
           </a:p>
         </p:txBody>
       </p:sp>
@@ -6834,7 +6905,7 @@
 </file>
 
 <file path=ppt/slides/slide16.xml><?xml version="1.0" encoding="utf-8"?>
-<p:sld xmlns:a="http://schemas.openxmlformats.org/drawingml/2006/main" xmlns:p="http://schemas.openxmlformats.org/presentationml/2006/main" xmlns:r="http://schemas.openxmlformats.org/officeDocument/2006/relationships">
+<p:sld xmlns:a="http://schemas.openxmlformats.org/drawingml/2006/main" xmlns:r="http://schemas.openxmlformats.org/officeDocument/2006/relationships" xmlns:p="http://schemas.openxmlformats.org/presentationml/2006/main">
   <p:cSld>
     <p:spTree>
       <p:nvGrpSpPr>
@@ -6842,7 +6913,14 @@
         <p:cNvGrpSpPr/>
         <p:nvPr/>
       </p:nvGrpSpPr>
-      <p:grpSpPr/>
+      <p:grpSpPr>
+        <a:xfrm>
+          <a:off x="0" y="0"/>
+          <a:ext cx="0" cy="0"/>
+          <a:chOff x="0" y="0"/>
+          <a:chExt cx="0" cy="0"/>
+        </a:xfrm>
+      </p:grpSpPr>
       <p:sp>
         <p:nvSpPr>
           <p:cNvPr id="2" name="Rectangle 1"/>
@@ -6884,6 +6962,7 @@
           <a:lstStyle/>
           <a:p>
             <a:pPr algn="ctr"/>
+            <a:endParaRPr/>
           </a:p>
         </p:txBody>
       </p:sp>
@@ -7077,7 +7156,7 @@
 </file>
 
 <file path=ppt/slides/slide17.xml><?xml version="1.0" encoding="utf-8"?>
-<p:sld xmlns:a="http://schemas.openxmlformats.org/drawingml/2006/main" xmlns:p="http://schemas.openxmlformats.org/presentationml/2006/main" xmlns:r="http://schemas.openxmlformats.org/officeDocument/2006/relationships">
+<p:sld xmlns:a="http://schemas.openxmlformats.org/drawingml/2006/main" xmlns:r="http://schemas.openxmlformats.org/officeDocument/2006/relationships" xmlns:p="http://schemas.openxmlformats.org/presentationml/2006/main">
   <p:cSld>
     <p:spTree>
       <p:nvGrpSpPr>
@@ -7085,7 +7164,14 @@
         <p:cNvGrpSpPr/>
         <p:nvPr/>
       </p:nvGrpSpPr>
-      <p:grpSpPr/>
+      <p:grpSpPr>
+        <a:xfrm>
+          <a:off x="0" y="0"/>
+          <a:ext cx="0" cy="0"/>
+          <a:chOff x="0" y="0"/>
+          <a:chExt cx="0" cy="0"/>
+        </a:xfrm>
+      </p:grpSpPr>
       <p:sp>
         <p:nvSpPr>
           <p:cNvPr id="2" name="Rectangle 1"/>
@@ -7127,6 +7213,7 @@
           <a:lstStyle/>
           <a:p>
             <a:pPr algn="ctr"/>
+            <a:endParaRPr/>
           </a:p>
         </p:txBody>
       </p:sp>
@@ -7320,7 +7407,7 @@
 </file>
 
 <file path=ppt/slides/slide18.xml><?xml version="1.0" encoding="utf-8"?>
-<p:sld xmlns:a="http://schemas.openxmlformats.org/drawingml/2006/main" xmlns:p="http://schemas.openxmlformats.org/presentationml/2006/main" xmlns:r="http://schemas.openxmlformats.org/officeDocument/2006/relationships">
+<p:sld xmlns:a="http://schemas.openxmlformats.org/drawingml/2006/main" xmlns:r="http://schemas.openxmlformats.org/officeDocument/2006/relationships" xmlns:p="http://schemas.openxmlformats.org/presentationml/2006/main">
   <p:cSld>
     <p:spTree>
       <p:nvGrpSpPr>
@@ -7328,7 +7415,14 @@
         <p:cNvGrpSpPr/>
         <p:nvPr/>
       </p:nvGrpSpPr>
-      <p:grpSpPr/>
+      <p:grpSpPr>
+        <a:xfrm>
+          <a:off x="0" y="0"/>
+          <a:ext cx="0" cy="0"/>
+          <a:chOff x="0" y="0"/>
+          <a:chExt cx="0" cy="0"/>
+        </a:xfrm>
+      </p:grpSpPr>
       <p:sp>
         <p:nvSpPr>
           <p:cNvPr id="2" name="Rectangle 1"/>
@@ -7370,6 +7464,7 @@
           <a:lstStyle/>
           <a:p>
             <a:pPr algn="ctr"/>
+            <a:endParaRPr/>
           </a:p>
         </p:txBody>
       </p:sp>
@@ -7492,6 +7587,7 @@
           <a:lstStyle/>
           <a:p>
             <a:pPr algn="ctr"/>
+            <a:endParaRPr/>
           </a:p>
         </p:txBody>
       </p:sp>
@@ -7575,7 +7671,7 @@
 </file>
 
 <file path=ppt/slides/slide19.xml><?xml version="1.0" encoding="utf-8"?>
-<p:sld xmlns:a="http://schemas.openxmlformats.org/drawingml/2006/main" xmlns:p="http://schemas.openxmlformats.org/presentationml/2006/main" xmlns:r="http://schemas.openxmlformats.org/officeDocument/2006/relationships">
+<p:sld xmlns:a="http://schemas.openxmlformats.org/drawingml/2006/main" xmlns:r="http://schemas.openxmlformats.org/officeDocument/2006/relationships" xmlns:p="http://schemas.openxmlformats.org/presentationml/2006/main">
   <p:cSld>
     <p:spTree>
       <p:nvGrpSpPr>
@@ -7583,7 +7679,14 @@
         <p:cNvGrpSpPr/>
         <p:nvPr/>
       </p:nvGrpSpPr>
-      <p:grpSpPr/>
+      <p:grpSpPr>
+        <a:xfrm>
+          <a:off x="0" y="0"/>
+          <a:ext cx="0" cy="0"/>
+          <a:chOff x="0" y="0"/>
+          <a:chExt cx="0" cy="0"/>
+        </a:xfrm>
+      </p:grpSpPr>
       <p:sp>
         <p:nvSpPr>
           <p:cNvPr id="2" name="Rectangle 1"/>
@@ -7625,6 +7728,7 @@
           <a:lstStyle/>
           <a:p>
             <a:pPr algn="ctr"/>
+            <a:endParaRPr/>
           </a:p>
         </p:txBody>
       </p:sp>
@@ -7818,7 +7922,7 @@
 </file>
 
 <file path=ppt/slides/slide2.xml><?xml version="1.0" encoding="utf-8"?>
-<p:sld xmlns:a="http://schemas.openxmlformats.org/drawingml/2006/main" xmlns:p="http://schemas.openxmlformats.org/presentationml/2006/main" xmlns:r="http://schemas.openxmlformats.org/officeDocument/2006/relationships">
+<p:sld xmlns:a="http://schemas.openxmlformats.org/drawingml/2006/main" xmlns:r="http://schemas.openxmlformats.org/officeDocument/2006/relationships" xmlns:p="http://schemas.openxmlformats.org/presentationml/2006/main">
   <p:cSld>
     <p:spTree>
       <p:nvGrpSpPr>
@@ -7826,7 +7930,14 @@
         <p:cNvGrpSpPr/>
         <p:nvPr/>
       </p:nvGrpSpPr>
-      <p:grpSpPr/>
+      <p:grpSpPr>
+        <a:xfrm>
+          <a:off x="0" y="0"/>
+          <a:ext cx="0" cy="0"/>
+          <a:chOff x="0" y="0"/>
+          <a:chExt cx="0" cy="0"/>
+        </a:xfrm>
+      </p:grpSpPr>
       <p:sp>
         <p:nvSpPr>
           <p:cNvPr id="2" name="Rectangle 1"/>
@@ -7868,6 +7979,7 @@
           <a:lstStyle/>
           <a:p>
             <a:pPr algn="ctr"/>
+            <a:endParaRPr/>
           </a:p>
         </p:txBody>
       </p:sp>
@@ -8054,7 +8166,7 @@
 </file>
 
 <file path=ppt/slides/slide20.xml><?xml version="1.0" encoding="utf-8"?>
-<p:sld xmlns:a="http://schemas.openxmlformats.org/drawingml/2006/main" xmlns:p="http://schemas.openxmlformats.org/presentationml/2006/main" xmlns:r="http://schemas.openxmlformats.org/officeDocument/2006/relationships">
+<p:sld xmlns:a="http://schemas.openxmlformats.org/drawingml/2006/main" xmlns:r="http://schemas.openxmlformats.org/officeDocument/2006/relationships" xmlns:p="http://schemas.openxmlformats.org/presentationml/2006/main">
   <p:cSld>
     <p:spTree>
       <p:nvGrpSpPr>
@@ -8062,7 +8174,14 @@
         <p:cNvGrpSpPr/>
         <p:nvPr/>
       </p:nvGrpSpPr>
-      <p:grpSpPr/>
+      <p:grpSpPr>
+        <a:xfrm>
+          <a:off x="0" y="0"/>
+          <a:ext cx="0" cy="0"/>
+          <a:chOff x="0" y="0"/>
+          <a:chExt cx="0" cy="0"/>
+        </a:xfrm>
+      </p:grpSpPr>
       <p:sp>
         <p:nvSpPr>
           <p:cNvPr id="2" name="Rectangle 1"/>
@@ -8104,6 +8223,7 @@
           <a:lstStyle/>
           <a:p>
             <a:pPr algn="ctr"/>
+            <a:endParaRPr/>
           </a:p>
         </p:txBody>
       </p:sp>
@@ -8297,7 +8417,7 @@
 </file>
 
 <file path=ppt/slides/slide21.xml><?xml version="1.0" encoding="utf-8"?>
-<p:sld xmlns:a="http://schemas.openxmlformats.org/drawingml/2006/main" xmlns:p="http://schemas.openxmlformats.org/presentationml/2006/main" xmlns:r="http://schemas.openxmlformats.org/officeDocument/2006/relationships">
+<p:sld xmlns:a="http://schemas.openxmlformats.org/drawingml/2006/main" xmlns:r="http://schemas.openxmlformats.org/officeDocument/2006/relationships" xmlns:p="http://schemas.openxmlformats.org/presentationml/2006/main">
   <p:cSld>
     <p:spTree>
       <p:nvGrpSpPr>
@@ -8305,7 +8425,14 @@
         <p:cNvGrpSpPr/>
         <p:nvPr/>
       </p:nvGrpSpPr>
-      <p:grpSpPr/>
+      <p:grpSpPr>
+        <a:xfrm>
+          <a:off x="0" y="0"/>
+          <a:ext cx="0" cy="0"/>
+          <a:chOff x="0" y="0"/>
+          <a:chExt cx="0" cy="0"/>
+        </a:xfrm>
+      </p:grpSpPr>
       <p:sp>
         <p:nvSpPr>
           <p:cNvPr id="2" name="Rectangle 1"/>
@@ -8347,6 +8474,7 @@
           <a:lstStyle/>
           <a:p>
             <a:pPr algn="ctr"/>
+            <a:endParaRPr/>
           </a:p>
         </p:txBody>
       </p:sp>
@@ -8540,7 +8668,7 @@
 </file>
 
 <file path=ppt/slides/slide22.xml><?xml version="1.0" encoding="utf-8"?>
-<p:sld xmlns:a="http://schemas.openxmlformats.org/drawingml/2006/main" xmlns:p="http://schemas.openxmlformats.org/presentationml/2006/main" xmlns:r="http://schemas.openxmlformats.org/officeDocument/2006/relationships">
+<p:sld xmlns:a="http://schemas.openxmlformats.org/drawingml/2006/main" xmlns:r="http://schemas.openxmlformats.org/officeDocument/2006/relationships" xmlns:p="http://schemas.openxmlformats.org/presentationml/2006/main">
   <p:cSld>
     <p:spTree>
       <p:nvGrpSpPr>
@@ -8548,7 +8676,14 @@
         <p:cNvGrpSpPr/>
         <p:nvPr/>
       </p:nvGrpSpPr>
-      <p:grpSpPr/>
+      <p:grpSpPr>
+        <a:xfrm>
+          <a:off x="0" y="0"/>
+          <a:ext cx="0" cy="0"/>
+          <a:chOff x="0" y="0"/>
+          <a:chExt cx="0" cy="0"/>
+        </a:xfrm>
+      </p:grpSpPr>
       <p:sp>
         <p:nvSpPr>
           <p:cNvPr id="2" name="Rectangle 1"/>
@@ -8590,6 +8725,7 @@
           <a:lstStyle/>
           <a:p>
             <a:pPr algn="ctr"/>
+            <a:endParaRPr/>
           </a:p>
         </p:txBody>
       </p:sp>
@@ -8712,6 +8848,7 @@
           <a:lstStyle/>
           <a:p>
             <a:pPr algn="ctr"/>
+            <a:endParaRPr/>
           </a:p>
         </p:txBody>
       </p:sp>
@@ -8795,7 +8932,7 @@
 </file>
 
 <file path=ppt/slides/slide23.xml><?xml version="1.0" encoding="utf-8"?>
-<p:sld xmlns:a="http://schemas.openxmlformats.org/drawingml/2006/main" xmlns:p="http://schemas.openxmlformats.org/presentationml/2006/main" xmlns:r="http://schemas.openxmlformats.org/officeDocument/2006/relationships">
+<p:sld xmlns:a="http://schemas.openxmlformats.org/drawingml/2006/main" xmlns:r="http://schemas.openxmlformats.org/officeDocument/2006/relationships" xmlns:p="http://schemas.openxmlformats.org/presentationml/2006/main">
   <p:cSld>
     <p:spTree>
       <p:nvGrpSpPr>
@@ -8803,7 +8940,14 @@
         <p:cNvGrpSpPr/>
         <p:nvPr/>
       </p:nvGrpSpPr>
-      <p:grpSpPr/>
+      <p:grpSpPr>
+        <a:xfrm>
+          <a:off x="0" y="0"/>
+          <a:ext cx="0" cy="0"/>
+          <a:chOff x="0" y="0"/>
+          <a:chExt cx="0" cy="0"/>
+        </a:xfrm>
+      </p:grpSpPr>
       <p:sp>
         <p:nvSpPr>
           <p:cNvPr id="2" name="Rectangle 1"/>
@@ -8845,6 +8989,7 @@
           <a:lstStyle/>
           <a:p>
             <a:pPr algn="ctr"/>
+            <a:endParaRPr/>
           </a:p>
         </p:txBody>
       </p:sp>
@@ -9038,7 +9183,7 @@
 </file>
 
 <file path=ppt/slides/slide24.xml><?xml version="1.0" encoding="utf-8"?>
-<p:sld xmlns:a="http://schemas.openxmlformats.org/drawingml/2006/main" xmlns:p="http://schemas.openxmlformats.org/presentationml/2006/main" xmlns:r="http://schemas.openxmlformats.org/officeDocument/2006/relationships">
+<p:sld xmlns:a="http://schemas.openxmlformats.org/drawingml/2006/main" xmlns:r="http://schemas.openxmlformats.org/officeDocument/2006/relationships" xmlns:p="http://schemas.openxmlformats.org/presentationml/2006/main">
   <p:cSld>
     <p:spTree>
       <p:nvGrpSpPr>
@@ -9046,7 +9191,14 @@
         <p:cNvGrpSpPr/>
         <p:nvPr/>
       </p:nvGrpSpPr>
-      <p:grpSpPr/>
+      <p:grpSpPr>
+        <a:xfrm>
+          <a:off x="0" y="0"/>
+          <a:ext cx="0" cy="0"/>
+          <a:chOff x="0" y="0"/>
+          <a:chExt cx="0" cy="0"/>
+        </a:xfrm>
+      </p:grpSpPr>
       <p:sp>
         <p:nvSpPr>
           <p:cNvPr id="2" name="Rectangle 1"/>
@@ -9088,6 +9240,7 @@
           <a:lstStyle/>
           <a:p>
             <a:pPr algn="ctr"/>
+            <a:endParaRPr/>
           </a:p>
         </p:txBody>
       </p:sp>
@@ -9281,7 +9434,7 @@
 </file>
 
 <file path=ppt/slides/slide25.xml><?xml version="1.0" encoding="utf-8"?>
-<p:sld xmlns:a="http://schemas.openxmlformats.org/drawingml/2006/main" xmlns:p="http://schemas.openxmlformats.org/presentationml/2006/main" xmlns:r="http://schemas.openxmlformats.org/officeDocument/2006/relationships">
+<p:sld xmlns:a="http://schemas.openxmlformats.org/drawingml/2006/main" xmlns:r="http://schemas.openxmlformats.org/officeDocument/2006/relationships" xmlns:p="http://schemas.openxmlformats.org/presentationml/2006/main">
   <p:cSld>
     <p:spTree>
       <p:nvGrpSpPr>
@@ -9289,7 +9442,14 @@
         <p:cNvGrpSpPr/>
         <p:nvPr/>
       </p:nvGrpSpPr>
-      <p:grpSpPr/>
+      <p:grpSpPr>
+        <a:xfrm>
+          <a:off x="0" y="0"/>
+          <a:ext cx="0" cy="0"/>
+          <a:chOff x="0" y="0"/>
+          <a:chExt cx="0" cy="0"/>
+        </a:xfrm>
+      </p:grpSpPr>
       <p:sp>
         <p:nvSpPr>
           <p:cNvPr id="2" name="Rectangle 1"/>
@@ -9331,6 +9491,7 @@
           <a:lstStyle/>
           <a:p>
             <a:pPr algn="ctr"/>
+            <a:endParaRPr/>
           </a:p>
         </p:txBody>
       </p:sp>
@@ -9524,7 +9685,7 @@
 </file>
 
 <file path=ppt/slides/slide26.xml><?xml version="1.0" encoding="utf-8"?>
-<p:sld xmlns:a="http://schemas.openxmlformats.org/drawingml/2006/main" xmlns:p="http://schemas.openxmlformats.org/presentationml/2006/main" xmlns:r="http://schemas.openxmlformats.org/officeDocument/2006/relationships">
+<p:sld xmlns:a="http://schemas.openxmlformats.org/drawingml/2006/main" xmlns:r="http://schemas.openxmlformats.org/officeDocument/2006/relationships" xmlns:p="http://schemas.openxmlformats.org/presentationml/2006/main">
   <p:cSld>
     <p:spTree>
       <p:nvGrpSpPr>
@@ -9532,7 +9693,14 @@
         <p:cNvGrpSpPr/>
         <p:nvPr/>
       </p:nvGrpSpPr>
-      <p:grpSpPr/>
+      <p:grpSpPr>
+        <a:xfrm>
+          <a:off x="0" y="0"/>
+          <a:ext cx="0" cy="0"/>
+          <a:chOff x="0" y="0"/>
+          <a:chExt cx="0" cy="0"/>
+        </a:xfrm>
+      </p:grpSpPr>
       <p:sp>
         <p:nvSpPr>
           <p:cNvPr id="2" name="Rectangle 1"/>
@@ -9574,6 +9742,7 @@
           <a:lstStyle/>
           <a:p>
             <a:pPr algn="ctr"/>
+            <a:endParaRPr/>
           </a:p>
         </p:txBody>
       </p:sp>
@@ -9696,6 +9865,7 @@
           <a:lstStyle/>
           <a:p>
             <a:pPr algn="ctr"/>
+            <a:endParaRPr/>
           </a:p>
         </p:txBody>
       </p:sp>
@@ -9763,7 +9933,7 @@
 </file>
 
 <file path=ppt/slides/slide27.xml><?xml version="1.0" encoding="utf-8"?>
-<p:sld xmlns:a="http://schemas.openxmlformats.org/drawingml/2006/main" xmlns:p="http://schemas.openxmlformats.org/presentationml/2006/main" xmlns:r="http://schemas.openxmlformats.org/officeDocument/2006/relationships">
+<p:sld xmlns:a="http://schemas.openxmlformats.org/drawingml/2006/main" xmlns:r="http://schemas.openxmlformats.org/officeDocument/2006/relationships" xmlns:p="http://schemas.openxmlformats.org/presentationml/2006/main">
   <p:cSld>
     <p:spTree>
       <p:nvGrpSpPr>
@@ -9771,7 +9941,14 @@
         <p:cNvGrpSpPr/>
         <p:nvPr/>
       </p:nvGrpSpPr>
-      <p:grpSpPr/>
+      <p:grpSpPr>
+        <a:xfrm>
+          <a:off x="0" y="0"/>
+          <a:ext cx="0" cy="0"/>
+          <a:chOff x="0" y="0"/>
+          <a:chExt cx="0" cy="0"/>
+        </a:xfrm>
+      </p:grpSpPr>
       <p:sp>
         <p:nvSpPr>
           <p:cNvPr id="2" name="Rectangle 1"/>
@@ -9813,6 +9990,7 @@
           <a:lstStyle/>
           <a:p>
             <a:pPr algn="ctr"/>
+            <a:endParaRPr/>
           </a:p>
         </p:txBody>
       </p:sp>
@@ -10006,7 +10184,7 @@
 </file>
 
 <file path=ppt/slides/slide28.xml><?xml version="1.0" encoding="utf-8"?>
-<p:sld xmlns:a="http://schemas.openxmlformats.org/drawingml/2006/main" xmlns:p="http://schemas.openxmlformats.org/presentationml/2006/main" xmlns:r="http://schemas.openxmlformats.org/officeDocument/2006/relationships">
+<p:sld xmlns:a="http://schemas.openxmlformats.org/drawingml/2006/main" xmlns:r="http://schemas.openxmlformats.org/officeDocument/2006/relationships" xmlns:p="http://schemas.openxmlformats.org/presentationml/2006/main">
   <p:cSld>
     <p:spTree>
       <p:nvGrpSpPr>
@@ -10014,7 +10192,14 @@
         <p:cNvGrpSpPr/>
         <p:nvPr/>
       </p:nvGrpSpPr>
-      <p:grpSpPr/>
+      <p:grpSpPr>
+        <a:xfrm>
+          <a:off x="0" y="0"/>
+          <a:ext cx="0" cy="0"/>
+          <a:chOff x="0" y="0"/>
+          <a:chExt cx="0" cy="0"/>
+        </a:xfrm>
+      </p:grpSpPr>
       <p:sp>
         <p:nvSpPr>
           <p:cNvPr id="2" name="Rectangle 1"/>
@@ -10056,6 +10241,7 @@
           <a:lstStyle/>
           <a:p>
             <a:pPr algn="ctr"/>
+            <a:endParaRPr/>
           </a:p>
         </p:txBody>
       </p:sp>
@@ -10249,7 +10435,7 @@
 </file>
 
 <file path=ppt/slides/slide29.xml><?xml version="1.0" encoding="utf-8"?>
-<p:sld xmlns:a="http://schemas.openxmlformats.org/drawingml/2006/main" xmlns:p="http://schemas.openxmlformats.org/presentationml/2006/main" xmlns:r="http://schemas.openxmlformats.org/officeDocument/2006/relationships">
+<p:sld xmlns:a="http://schemas.openxmlformats.org/drawingml/2006/main" xmlns:r="http://schemas.openxmlformats.org/officeDocument/2006/relationships" xmlns:p="http://schemas.openxmlformats.org/presentationml/2006/main">
   <p:cSld>
     <p:spTree>
       <p:nvGrpSpPr>
@@ -10257,7 +10443,14 @@
         <p:cNvGrpSpPr/>
         <p:nvPr/>
       </p:nvGrpSpPr>
-      <p:grpSpPr/>
+      <p:grpSpPr>
+        <a:xfrm>
+          <a:off x="0" y="0"/>
+          <a:ext cx="0" cy="0"/>
+          <a:chOff x="0" y="0"/>
+          <a:chExt cx="0" cy="0"/>
+        </a:xfrm>
+      </p:grpSpPr>
       <p:sp>
         <p:nvSpPr>
           <p:cNvPr id="2" name="Rectangle 1"/>
@@ -10299,6 +10492,7 @@
           <a:lstStyle/>
           <a:p>
             <a:pPr algn="ctr"/>
+            <a:endParaRPr/>
           </a:p>
         </p:txBody>
       </p:sp>
@@ -10492,7 +10686,7 @@
 </file>
 
 <file path=ppt/slides/slide3.xml><?xml version="1.0" encoding="utf-8"?>
-<p:sld xmlns:a="http://schemas.openxmlformats.org/drawingml/2006/main" xmlns:p="http://schemas.openxmlformats.org/presentationml/2006/main" xmlns:r="http://schemas.openxmlformats.org/officeDocument/2006/relationships">
+<p:sld xmlns:a="http://schemas.openxmlformats.org/drawingml/2006/main" xmlns:r="http://schemas.openxmlformats.org/officeDocument/2006/relationships" xmlns:p="http://schemas.openxmlformats.org/presentationml/2006/main">
   <p:cSld>
     <p:spTree>
       <p:nvGrpSpPr>
@@ -10500,7 +10694,14 @@
         <p:cNvGrpSpPr/>
         <p:nvPr/>
       </p:nvGrpSpPr>
-      <p:grpSpPr/>
+      <p:grpSpPr>
+        <a:xfrm>
+          <a:off x="0" y="0"/>
+          <a:ext cx="0" cy="0"/>
+          <a:chOff x="0" y="0"/>
+          <a:chExt cx="0" cy="0"/>
+        </a:xfrm>
+      </p:grpSpPr>
       <p:sp>
         <p:nvSpPr>
           <p:cNvPr id="2" name="Rectangle 1"/>
@@ -10542,6 +10743,7 @@
           <a:lstStyle/>
           <a:p>
             <a:pPr algn="ctr"/>
+            <a:endParaRPr/>
           </a:p>
         </p:txBody>
       </p:sp>
@@ -10712,7 +10914,7 @@
 </file>
 
 <file path=ppt/slides/slide30.xml><?xml version="1.0" encoding="utf-8"?>
-<p:sld xmlns:a="http://schemas.openxmlformats.org/drawingml/2006/main" xmlns:p="http://schemas.openxmlformats.org/presentationml/2006/main" xmlns:r="http://schemas.openxmlformats.org/officeDocument/2006/relationships">
+<p:sld xmlns:a="http://schemas.openxmlformats.org/drawingml/2006/main" xmlns:r="http://schemas.openxmlformats.org/officeDocument/2006/relationships" xmlns:p="http://schemas.openxmlformats.org/presentationml/2006/main">
   <p:cSld>
     <p:spTree>
       <p:nvGrpSpPr>
@@ -10720,7 +10922,14 @@
         <p:cNvGrpSpPr/>
         <p:nvPr/>
       </p:nvGrpSpPr>
-      <p:grpSpPr/>
+      <p:grpSpPr>
+        <a:xfrm>
+          <a:off x="0" y="0"/>
+          <a:ext cx="0" cy="0"/>
+          <a:chOff x="0" y="0"/>
+          <a:chExt cx="0" cy="0"/>
+        </a:xfrm>
+      </p:grpSpPr>
       <p:sp>
         <p:nvSpPr>
           <p:cNvPr id="2" name="Rectangle 1"/>
@@ -10762,6 +10971,7 @@
           <a:lstStyle/>
           <a:p>
             <a:pPr algn="ctr"/>
+            <a:endParaRPr/>
           </a:p>
         </p:txBody>
       </p:sp>
@@ -10884,6 +11094,7 @@
           <a:lstStyle/>
           <a:p>
             <a:pPr algn="ctr"/>
+            <a:endParaRPr/>
           </a:p>
         </p:txBody>
       </p:sp>
@@ -10967,7 +11178,7 @@
 </file>
 
 <file path=ppt/slides/slide31.xml><?xml version="1.0" encoding="utf-8"?>
-<p:sld xmlns:a="http://schemas.openxmlformats.org/drawingml/2006/main" xmlns:p="http://schemas.openxmlformats.org/presentationml/2006/main" xmlns:r="http://schemas.openxmlformats.org/officeDocument/2006/relationships">
+<p:sld xmlns:a="http://schemas.openxmlformats.org/drawingml/2006/main" xmlns:r="http://schemas.openxmlformats.org/officeDocument/2006/relationships" xmlns:p="http://schemas.openxmlformats.org/presentationml/2006/main">
   <p:cSld>
     <p:spTree>
       <p:nvGrpSpPr>
@@ -10975,7 +11186,14 @@
         <p:cNvGrpSpPr/>
         <p:nvPr/>
       </p:nvGrpSpPr>
-      <p:grpSpPr/>
+      <p:grpSpPr>
+        <a:xfrm>
+          <a:off x="0" y="0"/>
+          <a:ext cx="0" cy="0"/>
+          <a:chOff x="0" y="0"/>
+          <a:chExt cx="0" cy="0"/>
+        </a:xfrm>
+      </p:grpSpPr>
       <p:sp>
         <p:nvSpPr>
           <p:cNvPr id="2" name="Rectangle 1"/>
@@ -11017,6 +11235,7 @@
           <a:lstStyle/>
           <a:p>
             <a:pPr algn="ctr"/>
+            <a:endParaRPr/>
           </a:p>
         </p:txBody>
       </p:sp>
@@ -11210,7 +11429,7 @@
 </file>
 
 <file path=ppt/slides/slide32.xml><?xml version="1.0" encoding="utf-8"?>
-<p:sld xmlns:a="http://schemas.openxmlformats.org/drawingml/2006/main" xmlns:p="http://schemas.openxmlformats.org/presentationml/2006/main" xmlns:r="http://schemas.openxmlformats.org/officeDocument/2006/relationships">
+<p:sld xmlns:a="http://schemas.openxmlformats.org/drawingml/2006/main" xmlns:r="http://schemas.openxmlformats.org/officeDocument/2006/relationships" xmlns:p="http://schemas.openxmlformats.org/presentationml/2006/main">
   <p:cSld>
     <p:spTree>
       <p:nvGrpSpPr>
@@ -11218,7 +11437,14 @@
         <p:cNvGrpSpPr/>
         <p:nvPr/>
       </p:nvGrpSpPr>
-      <p:grpSpPr/>
+      <p:grpSpPr>
+        <a:xfrm>
+          <a:off x="0" y="0"/>
+          <a:ext cx="0" cy="0"/>
+          <a:chOff x="0" y="0"/>
+          <a:chExt cx="0" cy="0"/>
+        </a:xfrm>
+      </p:grpSpPr>
       <p:sp>
         <p:nvSpPr>
           <p:cNvPr id="2" name="Rectangle 1"/>
@@ -11260,6 +11486,7 @@
           <a:lstStyle/>
           <a:p>
             <a:pPr algn="ctr"/>
+            <a:endParaRPr/>
           </a:p>
         </p:txBody>
       </p:sp>
@@ -11453,7 +11680,7 @@
 </file>
 
 <file path=ppt/slides/slide33.xml><?xml version="1.0" encoding="utf-8"?>
-<p:sld xmlns:a="http://schemas.openxmlformats.org/drawingml/2006/main" xmlns:p="http://schemas.openxmlformats.org/presentationml/2006/main" xmlns:r="http://schemas.openxmlformats.org/officeDocument/2006/relationships">
+<p:sld xmlns:a="http://schemas.openxmlformats.org/drawingml/2006/main" xmlns:r="http://schemas.openxmlformats.org/officeDocument/2006/relationships" xmlns:p="http://schemas.openxmlformats.org/presentationml/2006/main">
   <p:cSld>
     <p:spTree>
       <p:nvGrpSpPr>
@@ -11461,7 +11688,14 @@
         <p:cNvGrpSpPr/>
         <p:nvPr/>
       </p:nvGrpSpPr>
-      <p:grpSpPr/>
+      <p:grpSpPr>
+        <a:xfrm>
+          <a:off x="0" y="0"/>
+          <a:ext cx="0" cy="0"/>
+          <a:chOff x="0" y="0"/>
+          <a:chExt cx="0" cy="0"/>
+        </a:xfrm>
+      </p:grpSpPr>
       <p:sp>
         <p:nvSpPr>
           <p:cNvPr id="2" name="Rectangle 1"/>
@@ -11503,6 +11737,7 @@
           <a:lstStyle/>
           <a:p>
             <a:pPr algn="ctr"/>
+            <a:endParaRPr/>
           </a:p>
         </p:txBody>
       </p:sp>
@@ -11696,7 +11931,7 @@
 </file>
 
 <file path=ppt/slides/slide34.xml><?xml version="1.0" encoding="utf-8"?>
-<p:sld xmlns:a="http://schemas.openxmlformats.org/drawingml/2006/main" xmlns:p="http://schemas.openxmlformats.org/presentationml/2006/main" xmlns:r="http://schemas.openxmlformats.org/officeDocument/2006/relationships">
+<p:sld xmlns:a="http://schemas.openxmlformats.org/drawingml/2006/main" xmlns:r="http://schemas.openxmlformats.org/officeDocument/2006/relationships" xmlns:p="http://schemas.openxmlformats.org/presentationml/2006/main">
   <p:cSld>
     <p:spTree>
       <p:nvGrpSpPr>
@@ -11704,7 +11939,14 @@
         <p:cNvGrpSpPr/>
         <p:nvPr/>
       </p:nvGrpSpPr>
-      <p:grpSpPr/>
+      <p:grpSpPr>
+        <a:xfrm>
+          <a:off x="0" y="0"/>
+          <a:ext cx="0" cy="0"/>
+          <a:chOff x="0" y="0"/>
+          <a:chExt cx="0" cy="0"/>
+        </a:xfrm>
+      </p:grpSpPr>
       <p:sp>
         <p:nvSpPr>
           <p:cNvPr id="2" name="Rectangle 1"/>
@@ -11746,6 +11988,7 @@
           <a:lstStyle/>
           <a:p>
             <a:pPr algn="ctr"/>
+            <a:endParaRPr/>
           </a:p>
         </p:txBody>
       </p:sp>
@@ -11996,7 +12239,7 @@
 </file>
 
 <file path=ppt/slides/slide35.xml><?xml version="1.0" encoding="utf-8"?>
-<p:sld xmlns:a="http://schemas.openxmlformats.org/drawingml/2006/main" xmlns:p="http://schemas.openxmlformats.org/presentationml/2006/main" xmlns:r="http://schemas.openxmlformats.org/officeDocument/2006/relationships">
+<p:sld xmlns:a="http://schemas.openxmlformats.org/drawingml/2006/main" xmlns:r="http://schemas.openxmlformats.org/officeDocument/2006/relationships" xmlns:p="http://schemas.openxmlformats.org/presentationml/2006/main">
   <p:cSld>
     <p:spTree>
       <p:nvGrpSpPr>
@@ -12004,7 +12247,14 @@
         <p:cNvGrpSpPr/>
         <p:nvPr/>
       </p:nvGrpSpPr>
-      <p:grpSpPr/>
+      <p:grpSpPr>
+        <a:xfrm>
+          <a:off x="0" y="0"/>
+          <a:ext cx="0" cy="0"/>
+          <a:chOff x="0" y="0"/>
+          <a:chExt cx="0" cy="0"/>
+        </a:xfrm>
+      </p:grpSpPr>
       <p:sp>
         <p:nvSpPr>
           <p:cNvPr id="2" name="Rectangle 1"/>
@@ -12046,6 +12296,7 @@
           <a:lstStyle/>
           <a:p>
             <a:pPr algn="ctr"/>
+            <a:endParaRPr/>
           </a:p>
         </p:txBody>
       </p:sp>
@@ -12248,7 +12499,7 @@
 </file>
 
 <file path=ppt/slides/slide36.xml><?xml version="1.0" encoding="utf-8"?>
-<p:sld xmlns:a="http://schemas.openxmlformats.org/drawingml/2006/main" xmlns:p="http://schemas.openxmlformats.org/presentationml/2006/main" xmlns:r="http://schemas.openxmlformats.org/officeDocument/2006/relationships">
+<p:sld xmlns:a="http://schemas.openxmlformats.org/drawingml/2006/main" xmlns:r="http://schemas.openxmlformats.org/officeDocument/2006/relationships" xmlns:p="http://schemas.openxmlformats.org/presentationml/2006/main">
   <p:cSld>
     <p:spTree>
       <p:nvGrpSpPr>
@@ -12256,7 +12507,14 @@
         <p:cNvGrpSpPr/>
         <p:nvPr/>
       </p:nvGrpSpPr>
-      <p:grpSpPr/>
+      <p:grpSpPr>
+        <a:xfrm>
+          <a:off x="0" y="0"/>
+          <a:ext cx="0" cy="0"/>
+          <a:chOff x="0" y="0"/>
+          <a:chExt cx="0" cy="0"/>
+        </a:xfrm>
+      </p:grpSpPr>
       <p:sp>
         <p:nvSpPr>
           <p:cNvPr id="2" name="Rectangle 1"/>
@@ -12298,6 +12556,7 @@
           <a:lstStyle/>
           <a:p>
             <a:pPr algn="ctr"/>
+            <a:endParaRPr/>
           </a:p>
         </p:txBody>
       </p:sp>
@@ -12484,7 +12743,7 @@
 </file>
 
 <file path=ppt/slides/slide4.xml><?xml version="1.0" encoding="utf-8"?>
-<p:sld xmlns:a="http://schemas.openxmlformats.org/drawingml/2006/main" xmlns:p="http://schemas.openxmlformats.org/presentationml/2006/main" xmlns:r="http://schemas.openxmlformats.org/officeDocument/2006/relationships">
+<p:sld xmlns:a="http://schemas.openxmlformats.org/drawingml/2006/main" xmlns:r="http://schemas.openxmlformats.org/officeDocument/2006/relationships" xmlns:p="http://schemas.openxmlformats.org/presentationml/2006/main">
   <p:cSld>
     <p:spTree>
       <p:nvGrpSpPr>
@@ -12492,7 +12751,14 @@
         <p:cNvGrpSpPr/>
         <p:nvPr/>
       </p:nvGrpSpPr>
-      <p:grpSpPr/>
+      <p:grpSpPr>
+        <a:xfrm>
+          <a:off x="0" y="0"/>
+          <a:ext cx="0" cy="0"/>
+          <a:chOff x="0" y="0"/>
+          <a:chExt cx="0" cy="0"/>
+        </a:xfrm>
+      </p:grpSpPr>
       <p:sp>
         <p:nvSpPr>
           <p:cNvPr id="2" name="Rectangle 1"/>
@@ -12534,6 +12800,7 @@
           <a:lstStyle/>
           <a:p>
             <a:pPr algn="ctr"/>
+            <a:endParaRPr/>
           </a:p>
         </p:txBody>
       </p:sp>
@@ -12727,7 +12994,7 @@
 </file>
 
 <file path=ppt/slides/slide5.xml><?xml version="1.0" encoding="utf-8"?>
-<p:sld xmlns:a="http://schemas.openxmlformats.org/drawingml/2006/main" xmlns:p="http://schemas.openxmlformats.org/presentationml/2006/main" xmlns:r="http://schemas.openxmlformats.org/officeDocument/2006/relationships">
+<p:sld xmlns:a="http://schemas.openxmlformats.org/drawingml/2006/main" xmlns:r="http://schemas.openxmlformats.org/officeDocument/2006/relationships" xmlns:p="http://schemas.openxmlformats.org/presentationml/2006/main">
   <p:cSld>
     <p:spTree>
       <p:nvGrpSpPr>
@@ -12735,7 +13002,14 @@
         <p:cNvGrpSpPr/>
         <p:nvPr/>
       </p:nvGrpSpPr>
-      <p:grpSpPr/>
+      <p:grpSpPr>
+        <a:xfrm>
+          <a:off x="0" y="0"/>
+          <a:ext cx="0" cy="0"/>
+          <a:chOff x="0" y="0"/>
+          <a:chExt cx="0" cy="0"/>
+        </a:xfrm>
+      </p:grpSpPr>
       <p:sp>
         <p:nvSpPr>
           <p:cNvPr id="2" name="Rectangle 1"/>
@@ -12777,6 +13051,7 @@
           <a:lstStyle/>
           <a:p>
             <a:pPr algn="ctr"/>
+            <a:endParaRPr/>
           </a:p>
         </p:txBody>
       </p:sp>
@@ -12899,6 +13174,7 @@
           <a:lstStyle/>
           <a:p>
             <a:pPr algn="ctr"/>
+            <a:endParaRPr/>
           </a:p>
         </p:txBody>
       </p:sp>
@@ -12966,7 +13242,7 @@
 </file>
 
 <file path=ppt/slides/slide6.xml><?xml version="1.0" encoding="utf-8"?>
-<p:sld xmlns:a="http://schemas.openxmlformats.org/drawingml/2006/main" xmlns:p="http://schemas.openxmlformats.org/presentationml/2006/main" xmlns:r="http://schemas.openxmlformats.org/officeDocument/2006/relationships">
+<p:sld xmlns:a="http://schemas.openxmlformats.org/drawingml/2006/main" xmlns:r="http://schemas.openxmlformats.org/officeDocument/2006/relationships" xmlns:p="http://schemas.openxmlformats.org/presentationml/2006/main">
   <p:cSld>
     <p:spTree>
       <p:nvGrpSpPr>
@@ -12974,7 +13250,14 @@
         <p:cNvGrpSpPr/>
         <p:nvPr/>
       </p:nvGrpSpPr>
-      <p:grpSpPr/>
+      <p:grpSpPr>
+        <a:xfrm>
+          <a:off x="0" y="0"/>
+          <a:ext cx="0" cy="0"/>
+          <a:chOff x="0" y="0"/>
+          <a:chExt cx="0" cy="0"/>
+        </a:xfrm>
+      </p:grpSpPr>
       <p:sp>
         <p:nvSpPr>
           <p:cNvPr id="2" name="Rectangle 1"/>
@@ -13016,6 +13299,7 @@
           <a:lstStyle/>
           <a:p>
             <a:pPr algn="ctr"/>
+            <a:endParaRPr/>
           </a:p>
         </p:txBody>
       </p:sp>
@@ -13209,7 +13493,7 @@
 </file>
 
 <file path=ppt/slides/slide7.xml><?xml version="1.0" encoding="utf-8"?>
-<p:sld xmlns:a="http://schemas.openxmlformats.org/drawingml/2006/main" xmlns:p="http://schemas.openxmlformats.org/presentationml/2006/main" xmlns:r="http://schemas.openxmlformats.org/officeDocument/2006/relationships">
+<p:sld xmlns:a="http://schemas.openxmlformats.org/drawingml/2006/main" xmlns:r="http://schemas.openxmlformats.org/officeDocument/2006/relationships" xmlns:p="http://schemas.openxmlformats.org/presentationml/2006/main">
   <p:cSld>
     <p:spTree>
       <p:nvGrpSpPr>
@@ -13217,7 +13501,14 @@
         <p:cNvGrpSpPr/>
         <p:nvPr/>
       </p:nvGrpSpPr>
-      <p:grpSpPr/>
+      <p:grpSpPr>
+        <a:xfrm>
+          <a:off x="0" y="0"/>
+          <a:ext cx="0" cy="0"/>
+          <a:chOff x="0" y="0"/>
+          <a:chExt cx="0" cy="0"/>
+        </a:xfrm>
+      </p:grpSpPr>
       <p:sp>
         <p:nvSpPr>
           <p:cNvPr id="2" name="Rectangle 1"/>
@@ -13259,6 +13550,7 @@
           <a:lstStyle/>
           <a:p>
             <a:pPr algn="ctr"/>
+            <a:endParaRPr/>
           </a:p>
         </p:txBody>
       </p:sp>
@@ -13452,7 +13744,7 @@
 </file>
 
 <file path=ppt/slides/slide8.xml><?xml version="1.0" encoding="utf-8"?>
-<p:sld xmlns:a="http://schemas.openxmlformats.org/drawingml/2006/main" xmlns:p="http://schemas.openxmlformats.org/presentationml/2006/main" xmlns:r="http://schemas.openxmlformats.org/officeDocument/2006/relationships">
+<p:sld xmlns:a="http://schemas.openxmlformats.org/drawingml/2006/main" xmlns:r="http://schemas.openxmlformats.org/officeDocument/2006/relationships" xmlns:p="http://schemas.openxmlformats.org/presentationml/2006/main">
   <p:cSld>
     <p:spTree>
       <p:nvGrpSpPr>
@@ -13460,7 +13752,14 @@
         <p:cNvGrpSpPr/>
         <p:nvPr/>
       </p:nvGrpSpPr>
-      <p:grpSpPr/>
+      <p:grpSpPr>
+        <a:xfrm>
+          <a:off x="0" y="0"/>
+          <a:ext cx="0" cy="0"/>
+          <a:chOff x="0" y="0"/>
+          <a:chExt cx="0" cy="0"/>
+        </a:xfrm>
+      </p:grpSpPr>
       <p:sp>
         <p:nvSpPr>
           <p:cNvPr id="2" name="Rectangle 1"/>
@@ -13502,6 +13801,7 @@
           <a:lstStyle/>
           <a:p>
             <a:pPr algn="ctr"/>
+            <a:endParaRPr/>
           </a:p>
         </p:txBody>
       </p:sp>
@@ -13695,7 +13995,7 @@
 </file>
 
 <file path=ppt/slides/slide9.xml><?xml version="1.0" encoding="utf-8"?>
-<p:sld xmlns:a="http://schemas.openxmlformats.org/drawingml/2006/main" xmlns:p="http://schemas.openxmlformats.org/presentationml/2006/main" xmlns:r="http://schemas.openxmlformats.org/officeDocument/2006/relationships">
+<p:sld xmlns:a="http://schemas.openxmlformats.org/drawingml/2006/main" xmlns:r="http://schemas.openxmlformats.org/officeDocument/2006/relationships" xmlns:p="http://schemas.openxmlformats.org/presentationml/2006/main">
   <p:cSld>
     <p:spTree>
       <p:nvGrpSpPr>
@@ -13703,7 +14003,14 @@
         <p:cNvGrpSpPr/>
         <p:nvPr/>
       </p:nvGrpSpPr>
-      <p:grpSpPr/>
+      <p:grpSpPr>
+        <a:xfrm>
+          <a:off x="0" y="0"/>
+          <a:ext cx="0" cy="0"/>
+          <a:chOff x="0" y="0"/>
+          <a:chExt cx="0" cy="0"/>
+        </a:xfrm>
+      </p:grpSpPr>
       <p:sp>
         <p:nvSpPr>
           <p:cNvPr id="2" name="Rectangle 1"/>
@@ -13745,6 +14052,7 @@
           <a:lstStyle/>
           <a:p>
             <a:pPr algn="ctr"/>
+            <a:endParaRPr/>
           </a:p>
         </p:txBody>
       </p:sp>
@@ -13867,6 +14175,7 @@
           <a:lstStyle/>
           <a:p>
             <a:pPr algn="ctr"/>
+            <a:endParaRPr/>
           </a:p>
         </p:txBody>
       </p:sp>
@@ -14270,7 +14579,7 @@
 </file>
 
 <file path=ppt/theme/theme2.xml><?xml version="1.0" encoding="utf-8"?>
-<a:theme xmlns:a="http://schemas.openxmlformats.org/drawingml/2006/main" name="Office Theme">
+<a:theme xmlns:a="http://schemas.openxmlformats.org/drawingml/2006/main" name="Office 테마">
   <a:themeElements>
     <a:clrScheme name="Office">
       <a:dk1>
@@ -14280,44 +14589,44 @@
         <a:sysClr val="window" lastClr="FFFFFF"/>
       </a:lt1>
       <a:dk2>
-        <a:srgbClr val="1F497D"/>
+        <a:srgbClr val="0E2841"/>
       </a:dk2>
       <a:lt2>
-        <a:srgbClr val="EEECE1"/>
+        <a:srgbClr val="E8E8E8"/>
       </a:lt2>
       <a:accent1>
-        <a:srgbClr val="4F81BD"/>
+        <a:srgbClr val="156082"/>
       </a:accent1>
       <a:accent2>
-        <a:srgbClr val="C0504D"/>
+        <a:srgbClr val="E97132"/>
       </a:accent2>
       <a:accent3>
-        <a:srgbClr val="9BBB59"/>
+        <a:srgbClr val="196B24"/>
       </a:accent3>
       <a:accent4>
-        <a:srgbClr val="8064A2"/>
+        <a:srgbClr val="0F9ED5"/>
       </a:accent4>
       <a:accent5>
-        <a:srgbClr val="4BACC6"/>
+        <a:srgbClr val="A02B93"/>
       </a:accent5>
       <a:accent6>
-        <a:srgbClr val="F79646"/>
+        <a:srgbClr val="4EA72E"/>
       </a:accent6>
       <a:hlink>
-        <a:srgbClr val="0000FF"/>
+        <a:srgbClr val="467886"/>
       </a:hlink>
       <a:folHlink>
-        <a:srgbClr val="800080"/>
+        <a:srgbClr val="96607D"/>
       </a:folHlink>
     </a:clrScheme>
     <a:fontScheme name="Office">
       <a:majorFont>
-        <a:latin typeface="Calibri"/>
+        <a:latin typeface="맑은 고딕" panose="02110004020202020204"/>
         <a:ea typeface=""/>
         <a:cs typeface=""/>
-        <a:font script="Jpan" typeface="ＭＳ Ｐゴシック"/>
+        <a:font script="Jpan" typeface="游ゴシック Light"/>
         <a:font script="Hang" typeface="맑은 고딕"/>
-        <a:font script="Hans" typeface="宋体"/>
+        <a:font script="Hans" typeface="等线 Light"/>
         <a:font script="Hant" typeface="新細明體"/>
         <a:font script="Arab" typeface="Times New Roman"/>
         <a:font script="Hebr" typeface="Times New Roman"/>
@@ -14345,14 +14654,31 @@
         <a:font script="Viet" typeface="Times New Roman"/>
         <a:font script="Uigh" typeface="Microsoft Uighur"/>
         <a:font script="Geor" typeface="Sylfaen"/>
+        <a:font script="Armn" typeface="Arial"/>
+        <a:font script="Bugi" typeface="Leelawadee UI"/>
+        <a:font script="Bopo" typeface="Microsoft JhengHei"/>
+        <a:font script="Java" typeface="Javanese Text"/>
+        <a:font script="Lisu" typeface="Segoe UI"/>
+        <a:font script="Mymr" typeface="Myanmar Text"/>
+        <a:font script="Nkoo" typeface="Ebrima"/>
+        <a:font script="Olck" typeface="Nirmala UI"/>
+        <a:font script="Osma" typeface="Ebrima"/>
+        <a:font script="Phag" typeface="Phagspa"/>
+        <a:font script="Syrn" typeface="Estrangelo Edessa"/>
+        <a:font script="Syrj" typeface="Estrangelo Edessa"/>
+        <a:font script="Syre" typeface="Estrangelo Edessa"/>
+        <a:font script="Sora" typeface="Nirmala UI"/>
+        <a:font script="Tale" typeface="Microsoft Tai Le"/>
+        <a:font script="Talu" typeface="Microsoft New Tai Lue"/>
+        <a:font script="Tfng" typeface="Ebrima"/>
       </a:majorFont>
       <a:minorFont>
-        <a:latin typeface="Calibri"/>
+        <a:latin typeface="맑은 고딕" panose="02110004020202020204"/>
         <a:ea typeface=""/>
         <a:cs typeface=""/>
-        <a:font script="Jpan" typeface="ＭＳ Ｐゴシック"/>
+        <a:font script="Jpan" typeface="游ゴシック"/>
         <a:font script="Hang" typeface="맑은 고딕"/>
-        <a:font script="Hans" typeface="宋体"/>
+        <a:font script="Hans" typeface="等线"/>
         <a:font script="Hant" typeface="新細明體"/>
         <a:font script="Arab" typeface="Arial"/>
         <a:font script="Hebr" typeface="Arial"/>
@@ -14380,6 +14706,23 @@
         <a:font script="Viet" typeface="Arial"/>
         <a:font script="Uigh" typeface="Microsoft Uighur"/>
         <a:font script="Geor" typeface="Sylfaen"/>
+        <a:font script="Armn" typeface="Arial"/>
+        <a:font script="Bugi" typeface="Leelawadee UI"/>
+        <a:font script="Bopo" typeface="Microsoft JhengHei"/>
+        <a:font script="Java" typeface="Javanese Text"/>
+        <a:font script="Lisu" typeface="Segoe UI"/>
+        <a:font script="Mymr" typeface="Myanmar Text"/>
+        <a:font script="Nkoo" typeface="Ebrima"/>
+        <a:font script="Olck" typeface="Nirmala UI"/>
+        <a:font script="Osma" typeface="Ebrima"/>
+        <a:font script="Phag" typeface="Phagspa"/>
+        <a:font script="Syrn" typeface="Estrangelo Edessa"/>
+        <a:font script="Syrj" typeface="Estrangelo Edessa"/>
+        <a:font script="Syre" typeface="Estrangelo Edessa"/>
+        <a:font script="Sora" typeface="Nirmala UI"/>
+        <a:font script="Tale" typeface="Microsoft Tai Le"/>
+        <a:font script="Talu" typeface="Microsoft New Tai Lue"/>
+        <a:font script="Tfng" typeface="Ebrima"/>
       </a:minorFont>
     </a:fontScheme>
     <a:fmtScheme name="Office">
@@ -14391,180 +14734,136 @@
           <a:gsLst>
             <a:gs pos="0">
               <a:schemeClr val="phClr">
-                <a:tint val="50000"/>
-                <a:satMod val="300000"/>
+                <a:lumMod val="110000"/>
+                <a:satMod val="105000"/>
+                <a:tint val="67000"/>
               </a:schemeClr>
             </a:gs>
-            <a:gs pos="35000">
+            <a:gs pos="50000">
               <a:schemeClr val="phClr">
-                <a:tint val="37000"/>
-                <a:satMod val="300000"/>
+                <a:lumMod val="105000"/>
+                <a:satMod val="103000"/>
+                <a:tint val="73000"/>
               </a:schemeClr>
             </a:gs>
             <a:gs pos="100000">
               <a:schemeClr val="phClr">
-                <a:tint val="15000"/>
-                <a:satMod val="350000"/>
+                <a:lumMod val="105000"/>
+                <a:satMod val="109000"/>
+                <a:tint val="81000"/>
               </a:schemeClr>
             </a:gs>
           </a:gsLst>
-          <a:lin ang="16200000" scaled="1"/>
+          <a:lin ang="5400000" scaled="0"/>
         </a:gradFill>
         <a:gradFill rotWithShape="1">
           <a:gsLst>
             <a:gs pos="0">
               <a:schemeClr val="phClr">
-                <a:tint val="100000"/>
+                <a:satMod val="103000"/>
+                <a:lumMod val="102000"/>
+                <a:tint val="94000"/>
+              </a:schemeClr>
+            </a:gs>
+            <a:gs pos="50000">
+              <a:schemeClr val="phClr">
+                <a:satMod val="110000"/>
+                <a:lumMod val="100000"/>
                 <a:shade val="100000"/>
-                <a:satMod val="130000"/>
               </a:schemeClr>
             </a:gs>
             <a:gs pos="100000">
               <a:schemeClr val="phClr">
-                <a:tint val="50000"/>
-                <a:shade val="100000"/>
-                <a:satMod val="350000"/>
+                <a:lumMod val="99000"/>
+                <a:satMod val="120000"/>
+                <a:shade val="78000"/>
               </a:schemeClr>
             </a:gs>
           </a:gsLst>
-          <a:lin ang="16200000" scaled="0"/>
+          <a:lin ang="5400000" scaled="0"/>
         </a:gradFill>
       </a:fillStyleLst>
       <a:lnStyleLst>
-        <a:ln w="9525" cap="flat" cmpd="sng" algn="ctr">
+        <a:ln w="12700" cap="flat" cmpd="sng" algn="ctr">
           <a:solidFill>
-            <a:schemeClr val="phClr">
-              <a:shade val="95000"/>
-              <a:satMod val="105000"/>
-            </a:schemeClr>
+            <a:schemeClr val="phClr"/>
           </a:solidFill>
           <a:prstDash val="solid"/>
+          <a:miter lim="800000"/>
+        </a:ln>
+        <a:ln w="19050" cap="flat" cmpd="sng" algn="ctr">
+          <a:solidFill>
+            <a:schemeClr val="phClr"/>
+          </a:solidFill>
+          <a:prstDash val="solid"/>
+          <a:miter lim="800000"/>
         </a:ln>
         <a:ln w="25400" cap="flat" cmpd="sng" algn="ctr">
           <a:solidFill>
             <a:schemeClr val="phClr"/>
           </a:solidFill>
           <a:prstDash val="solid"/>
-        </a:ln>
-        <a:ln w="38100" cap="flat" cmpd="sng" algn="ctr">
-          <a:solidFill>
-            <a:schemeClr val="phClr"/>
-          </a:solidFill>
-          <a:prstDash val="solid"/>
+          <a:miter lim="800000"/>
         </a:ln>
       </a:lnStyleLst>
       <a:effectStyleLst>
         <a:effectStyle>
+          <a:effectLst/>
+        </a:effectStyle>
+        <a:effectStyle>
+          <a:effectLst/>
+        </a:effectStyle>
+        <a:effectStyle>
           <a:effectLst>
-            <a:outerShdw blurRad="40000" dist="20000" dir="5400000" rotWithShape="0">
+            <a:outerShdw blurRad="57150" dist="19050" dir="5400000" algn="ctr" rotWithShape="0">
               <a:srgbClr val="000000">
-                <a:alpha val="38000"/>
+                <a:alpha val="63000"/>
               </a:srgbClr>
             </a:outerShdw>
           </a:effectLst>
-        </a:effectStyle>
-        <a:effectStyle>
-          <a:effectLst>
-            <a:outerShdw blurRad="40000" dist="23000" dir="5400000" rotWithShape="0">
-              <a:srgbClr val="000000">
-                <a:alpha val="35000"/>
-              </a:srgbClr>
-            </a:outerShdw>
-          </a:effectLst>
-        </a:effectStyle>
-        <a:effectStyle>
-          <a:effectLst>
-            <a:outerShdw blurRad="40000" dist="23000" dir="5400000" rotWithShape="0">
-              <a:srgbClr val="000000">
-                <a:alpha val="35000"/>
-              </a:srgbClr>
-            </a:outerShdw>
-          </a:effectLst>
-          <a:scene3d>
-            <a:camera prst="orthographicFront">
-              <a:rot lat="0" lon="0" rev="0"/>
-            </a:camera>
-            <a:lightRig rig="threePt" dir="t">
-              <a:rot lat="0" lon="0" rev="1200000"/>
-            </a:lightRig>
-          </a:scene3d>
-          <a:sp3d>
-            <a:bevelT w="63500" h="25400"/>
-          </a:sp3d>
         </a:effectStyle>
       </a:effectStyleLst>
       <a:bgFillStyleLst>
         <a:solidFill>
           <a:schemeClr val="phClr"/>
         </a:solidFill>
+        <a:solidFill>
+          <a:schemeClr val="phClr">
+            <a:tint val="95000"/>
+            <a:satMod val="170000"/>
+          </a:schemeClr>
+        </a:solidFill>
         <a:gradFill rotWithShape="1">
           <a:gsLst>
             <a:gs pos="0">
               <a:schemeClr val="phClr">
-                <a:tint val="40000"/>
-                <a:satMod val="350000"/>
+                <a:tint val="93000"/>
+                <a:satMod val="150000"/>
+                <a:shade val="98000"/>
+                <a:lumMod val="102000"/>
               </a:schemeClr>
             </a:gs>
-            <a:gs pos="40000">
+            <a:gs pos="50000">
               <a:schemeClr val="phClr">
-                <a:tint val="45000"/>
-                <a:shade val="99000"/>
-                <a:satMod val="350000"/>
+                <a:tint val="98000"/>
+                <a:satMod val="130000"/>
+                <a:shade val="90000"/>
+                <a:lumMod val="103000"/>
               </a:schemeClr>
             </a:gs>
             <a:gs pos="100000">
               <a:schemeClr val="phClr">
-                <a:shade val="20000"/>
-                <a:satMod val="255000"/>
+                <a:shade val="63000"/>
+                <a:satMod val="120000"/>
               </a:schemeClr>
             </a:gs>
           </a:gsLst>
-          <a:path path="circle">
-            <a:fillToRect l="50000" t="-80000" r="50000" b="180000"/>
-          </a:path>
-        </a:gradFill>
-        <a:gradFill rotWithShape="1">
-          <a:gsLst>
-            <a:gs pos="0">
-              <a:schemeClr val="phClr">
-                <a:tint val="80000"/>
-                <a:satMod val="300000"/>
-              </a:schemeClr>
-            </a:gs>
-            <a:gs pos="100000">
-              <a:schemeClr val="phClr">
-                <a:shade val="30000"/>
-                <a:satMod val="200000"/>
-              </a:schemeClr>
-            </a:gs>
-          </a:gsLst>
-          <a:path path="circle">
-            <a:fillToRect l="50000" t="50000" r="50000" b="50000"/>
-          </a:path>
+          <a:lin ang="5400000" scaled="0"/>
         </a:gradFill>
       </a:bgFillStyleLst>
     </a:fmtScheme>
   </a:themeElements>
   <a:objectDefaults>
-    <a:spDef>
-      <a:spPr/>
-      <a:bodyPr/>
-      <a:lstStyle/>
-      <a:style>
-        <a:lnRef idx="1">
-          <a:schemeClr val="accent1"/>
-        </a:lnRef>
-        <a:fillRef idx="3">
-          <a:schemeClr val="accent1"/>
-        </a:fillRef>
-        <a:effectRef idx="2">
-          <a:schemeClr val="accent1"/>
-        </a:effectRef>
-        <a:fontRef idx="minor">
-          <a:schemeClr val="lt1"/>
-        </a:fontRef>
-      </a:style>
-    </a:spDef>
     <a:lnDef>
       <a:spPr/>
       <a:bodyPr/>
@@ -14586,5 +14885,10 @@
     </a:lnDef>
   </a:objectDefaults>
   <a:extraClrSchemeLst/>
+  <a:extLst>
+    <a:ext uri="{05A4C25C-085E-4340-85A3-A5531E510DB2}">
+      <thm15:themeFamily xmlns:thm15="http://schemas.microsoft.com/office/thememl/2012/main" name="Office Theme" id="{2E142A2C-CD16-42D6-873A-C26D2A0506FA}" vid="{1BDDFF52-6CD6-40A5-AB3C-68EB2F1E4D0A}"/>
+    </a:ext>
+  </a:extLst>
 </a:theme>
 </file>